--- a/netcat_aat_project/Secure_Data_Transmission_over_Netcat_Presentation.pptx
+++ b/netcat_aat_project/Secure_Data_Transmission_over_Netcat_Presentation.pptx
@@ -21,6 +21,15 @@
     <p:sldId id="269" r:id="rId21"/>
     <p:sldId id="270" r:id="rId22"/>
     <p:sldId id="271" r:id="rId23"/>
+    <p:sldId id="272" r:id="rId24"/>
+    <p:sldId id="273" r:id="rId25"/>
+    <p:sldId id="274" r:id="rId26"/>
+    <p:sldId id="275" r:id="rId27"/>
+    <p:sldId id="276" r:id="rId28"/>
+    <p:sldId id="277" r:id="rId29"/>
+    <p:sldId id="278" r:id="rId30"/>
+    <p:sldId id="279" r:id="rId31"/>
+    <p:sldId id="280" r:id="rId32"/>
   </p:sldIdLst>
   <p:sldSz cx="12191695" cy="6858000" type="screen4x3"/>
   <p:notesSz cx="6858000" cy="9144000"/>
@@ -517,7 +526,7 @@
           <a:lstStyle/>
           <a:p>
             <a:r>
-              <a:t>Introduce the team and say the project compares unsafe plaintext transfer with encrypted transfer.</a:t>
+              <a:t>Introduce the team and say the project compares plaintext communication with encrypted communication.</a:t>
             </a:r>
           </a:p>
         </p:txBody>
@@ -587,7 +596,7 @@
           <a:lstStyle/>
           <a:p>
             <a:r>
-              <a:t>This is the secure channel demonstration.</a:t>
+              <a:t>Make the setup easy for beginners.</a:t>
             </a:r>
           </a:p>
         </p:txBody>
@@ -657,7 +666,7 @@
           <a:lstStyle/>
           <a:p>
             <a:r>
-              <a:t>Say that delivery works but the attacker cannot read the data.</a:t>
+              <a:t>Prepare before showing commands.</a:t>
             </a:r>
           </a:p>
         </p:txBody>
@@ -727,7 +736,7 @@
           <a:lstStyle/>
           <a:p>
             <a:r>
-              <a:t>Use this slide for marks because it clearly shows the result.</a:t>
+              <a:t>Show the unsafe experiment.</a:t>
             </a:r>
           </a:p>
         </p:txBody>
@@ -797,7 +806,7 @@
           <a:lstStyle/>
           <a:p>
             <a:r>
-              <a:t>Connect the demo to real-world cybersecurity.</a:t>
+              <a:t>Aditi can explain Wireshark result.</a:t>
             </a:r>
           </a:p>
         </p:txBody>
@@ -867,7 +876,7 @@
           <a:lstStyle/>
           <a:p>
             <a:r>
-              <a:t>Be honest about limitations; this improves credibility.</a:t>
+              <a:t>This matches the cryptanalysis marks.</a:t>
             </a:r>
           </a:p>
         </p:txBody>
@@ -937,7 +946,7 @@
           <a:lstStyle/>
           <a:p>
             <a:r>
-              <a:t>End confidently with the key result.</a:t>
+              <a:t>Explain the certificate in simple terms.</a:t>
             </a:r>
           </a:p>
         </p:txBody>
@@ -1007,7 +1016,217 @@
           <a:lstStyle/>
           <a:p>
             <a:r>
-              <a:t>This helps the team divide the presentation clearly.</a:t>
+              <a:t>Show secure experiment.</a:t>
+            </a:r>
+          </a:p>
+        </p:txBody>
+      </p:sp>
+      <p:sp>
+        <p:nvSpPr>
+          <p:cNvPr id="4" name="Slide Number Placeholder 3"/>
+          <p:cNvSpPr>
+            <a:spLocks noGrp="1"/>
+          </p:cNvSpPr>
+          <p:nvPr>
+            <p:ph type="sldNum" idx="5" sz="quarter"/>
+          </p:nvPr>
+        </p:nvSpPr>
+        <p:spPr/>
+      </p:sp>
+    </p:spTree>
+  </p:cSld>
+  <p:clrMapOvr>
+    <a:masterClrMapping/>
+  </p:clrMapOvr>
+</p:notes>
+</file>
+
+<file path=ppt/notesSlides/notesSlide17.xml><?xml version="1.0" encoding="utf-8"?>
+<p:notes xmlns:a="http://schemas.openxmlformats.org/drawingml/2006/main" xmlns:p="http://schemas.openxmlformats.org/presentationml/2006/main" xmlns:r="http://schemas.openxmlformats.org/officeDocument/2006/relationships">
+  <p:cSld>
+    <p:spTree>
+      <p:nvGrpSpPr>
+        <p:cNvPr id="1" name=""/>
+        <p:cNvGrpSpPr/>
+        <p:nvPr/>
+      </p:nvGrpSpPr>
+      <p:grpSpPr>
+        <a:xfrm>
+          <a:off x="0" y="0"/>
+          <a:ext cx="0" cy="0"/>
+          <a:chOff x="0" y="0"/>
+          <a:chExt cx="0" cy="0"/>
+        </a:xfrm>
+      </p:grpSpPr>
+      <p:sp>
+        <p:nvSpPr>
+          <p:cNvPr id="2" name="Slide Image Placeholder 1"/>
+          <p:cNvSpPr>
+            <a:spLocks noGrp="1"/>
+          </p:cNvSpPr>
+          <p:nvPr>
+            <p:ph type="sldImg" idx="2"/>
+          </p:nvPr>
+        </p:nvSpPr>
+        <p:spPr/>
+      </p:sp>
+      <p:sp>
+        <p:nvSpPr>
+          <p:cNvPr id="3" name="Notes Placeholder 2"/>
+          <p:cNvSpPr>
+            <a:spLocks noGrp="1"/>
+          </p:cNvSpPr>
+          <p:nvPr>
+            <p:ph type="body" idx="3" sz="quarter"/>
+          </p:nvPr>
+        </p:nvSpPr>
+        <p:spPr/>
+        <p:txBody>
+          <a:bodyPr/>
+          <a:lstStyle/>
+          <a:p>
+            <a:r>
+              <a:t>State the secure result clearly.</a:t>
+            </a:r>
+          </a:p>
+        </p:txBody>
+      </p:sp>
+      <p:sp>
+        <p:nvSpPr>
+          <p:cNvPr id="4" name="Slide Number Placeholder 3"/>
+          <p:cNvSpPr>
+            <a:spLocks noGrp="1"/>
+          </p:cNvSpPr>
+          <p:nvPr>
+            <p:ph type="sldNum" idx="5" sz="quarter"/>
+          </p:nvPr>
+        </p:nvSpPr>
+        <p:spPr/>
+      </p:sp>
+    </p:spTree>
+  </p:cSld>
+  <p:clrMapOvr>
+    <a:masterClrMapping/>
+  </p:clrMapOvr>
+</p:notes>
+</file>
+
+<file path=ppt/notesSlides/notesSlide18.xml><?xml version="1.0" encoding="utf-8"?>
+<p:notes xmlns:a="http://schemas.openxmlformats.org/drawingml/2006/main" xmlns:p="http://schemas.openxmlformats.org/presentationml/2006/main" xmlns:r="http://schemas.openxmlformats.org/officeDocument/2006/relationships">
+  <p:cSld>
+    <p:spTree>
+      <p:nvGrpSpPr>
+        <p:cNvPr id="1" name=""/>
+        <p:cNvGrpSpPr/>
+        <p:nvPr/>
+      </p:nvGrpSpPr>
+      <p:grpSpPr>
+        <a:xfrm>
+          <a:off x="0" y="0"/>
+          <a:ext cx="0" cy="0"/>
+          <a:chOff x="0" y="0"/>
+          <a:chExt cx="0" cy="0"/>
+        </a:xfrm>
+      </p:grpSpPr>
+      <p:sp>
+        <p:nvSpPr>
+          <p:cNvPr id="2" name="Slide Image Placeholder 1"/>
+          <p:cNvSpPr>
+            <a:spLocks noGrp="1"/>
+          </p:cNvSpPr>
+          <p:nvPr>
+            <p:ph type="sldImg" idx="2"/>
+          </p:nvPr>
+        </p:nvSpPr>
+        <p:spPr/>
+      </p:sp>
+      <p:sp>
+        <p:nvSpPr>
+          <p:cNvPr id="3" name="Notes Placeholder 2"/>
+          <p:cNvSpPr>
+            <a:spLocks noGrp="1"/>
+          </p:cNvSpPr>
+          <p:nvPr>
+            <p:ph type="body" idx="3" sz="quarter"/>
+          </p:nvPr>
+        </p:nvSpPr>
+        <p:spPr/>
+        <p:txBody>
+          <a:bodyPr/>
+          <a:lstStyle/>
+          <a:p>
+            <a:r>
+              <a:t>Use this slide with screenshots if possible.</a:t>
+            </a:r>
+          </a:p>
+        </p:txBody>
+      </p:sp>
+      <p:sp>
+        <p:nvSpPr>
+          <p:cNvPr id="4" name="Slide Number Placeholder 3"/>
+          <p:cNvSpPr>
+            <a:spLocks noGrp="1"/>
+          </p:cNvSpPr>
+          <p:nvPr>
+            <p:ph type="sldNum" idx="5" sz="quarter"/>
+          </p:nvPr>
+        </p:nvSpPr>
+        <p:spPr/>
+      </p:sp>
+    </p:spTree>
+  </p:cSld>
+  <p:clrMapOvr>
+    <a:masterClrMapping/>
+  </p:clrMapOvr>
+</p:notes>
+</file>
+
+<file path=ppt/notesSlides/notesSlide19.xml><?xml version="1.0" encoding="utf-8"?>
+<p:notes xmlns:a="http://schemas.openxmlformats.org/drawingml/2006/main" xmlns:p="http://schemas.openxmlformats.org/presentationml/2006/main" xmlns:r="http://schemas.openxmlformats.org/officeDocument/2006/relationships">
+  <p:cSld>
+    <p:spTree>
+      <p:nvGrpSpPr>
+        <p:cNvPr id="1" name=""/>
+        <p:cNvGrpSpPr/>
+        <p:nvPr/>
+      </p:nvGrpSpPr>
+      <p:grpSpPr>
+        <a:xfrm>
+          <a:off x="0" y="0"/>
+          <a:ext cx="0" cy="0"/>
+          <a:chOff x="0" y="0"/>
+          <a:chExt cx="0" cy="0"/>
+        </a:xfrm>
+      </p:grpSpPr>
+      <p:sp>
+        <p:nvSpPr>
+          <p:cNvPr id="2" name="Slide Image Placeholder 1"/>
+          <p:cNvSpPr>
+            <a:spLocks noGrp="1"/>
+          </p:cNvSpPr>
+          <p:nvPr>
+            <p:ph type="sldImg" idx="2"/>
+          </p:nvPr>
+        </p:nvSpPr>
+        <p:spPr/>
+      </p:sp>
+      <p:sp>
+        <p:nvSpPr>
+          <p:cNvPr id="3" name="Notes Placeholder 2"/>
+          <p:cNvSpPr>
+            <a:spLocks noGrp="1"/>
+          </p:cNvSpPr>
+          <p:nvPr>
+            <p:ph type="body" idx="3" sz="quarter"/>
+          </p:nvPr>
+        </p:nvSpPr>
+        <p:spPr/>
+        <p:txBody>
+          <a:bodyPr/>
+          <a:lstStyle/>
+          <a:p>
+            <a:r>
+              <a:t>Summarize comparison.</a:t>
             </a:r>
           </a:p>
         </p:txBody>
@@ -1077,7 +1296,427 @@
           <a:lstStyle/>
           <a:p>
             <a:r>
-              <a:t>This slide shows that the project follows the assignment instructions.</a:t>
+              <a:t>Explain that the topic is practical and understandable.</a:t>
+            </a:r>
+          </a:p>
+        </p:txBody>
+      </p:sp>
+      <p:sp>
+        <p:nvSpPr>
+          <p:cNvPr id="4" name="Slide Number Placeholder 3"/>
+          <p:cNvSpPr>
+            <a:spLocks noGrp="1"/>
+          </p:cNvSpPr>
+          <p:nvPr>
+            <p:ph type="sldNum" idx="5" sz="quarter"/>
+          </p:nvPr>
+        </p:nvSpPr>
+        <p:spPr/>
+      </p:sp>
+    </p:spTree>
+  </p:cSld>
+  <p:clrMapOvr>
+    <a:masterClrMapping/>
+  </p:clrMapOvr>
+</p:notes>
+</file>
+
+<file path=ppt/notesSlides/notesSlide20.xml><?xml version="1.0" encoding="utf-8"?>
+<p:notes xmlns:a="http://schemas.openxmlformats.org/drawingml/2006/main" xmlns:p="http://schemas.openxmlformats.org/presentationml/2006/main" xmlns:r="http://schemas.openxmlformats.org/officeDocument/2006/relationships">
+  <p:cSld>
+    <p:spTree>
+      <p:nvGrpSpPr>
+        <p:cNvPr id="1" name=""/>
+        <p:cNvGrpSpPr/>
+        <p:nvPr/>
+      </p:nvGrpSpPr>
+      <p:grpSpPr>
+        <a:xfrm>
+          <a:off x="0" y="0"/>
+          <a:ext cx="0" cy="0"/>
+          <a:chOff x="0" y="0"/>
+          <a:chExt cx="0" cy="0"/>
+        </a:xfrm>
+      </p:grpSpPr>
+      <p:sp>
+        <p:nvSpPr>
+          <p:cNvPr id="2" name="Slide Image Placeholder 1"/>
+          <p:cNvSpPr>
+            <a:spLocks noGrp="1"/>
+          </p:cNvSpPr>
+          <p:nvPr>
+            <p:ph type="sldImg" idx="2"/>
+          </p:nvPr>
+        </p:nvSpPr>
+        <p:spPr/>
+      </p:sp>
+      <p:sp>
+        <p:nvSpPr>
+          <p:cNvPr id="3" name="Notes Placeholder 2"/>
+          <p:cNvSpPr>
+            <a:spLocks noGrp="1"/>
+          </p:cNvSpPr>
+          <p:nvPr>
+            <p:ph type="body" idx="3" sz="quarter"/>
+          </p:nvPr>
+        </p:nvSpPr>
+        <p:spPr/>
+        <p:txBody>
+          <a:bodyPr/>
+          <a:lstStyle/>
+          <a:p>
+            <a:r>
+              <a:t>Connect to real-world examples.</a:t>
+            </a:r>
+          </a:p>
+        </p:txBody>
+      </p:sp>
+      <p:sp>
+        <p:nvSpPr>
+          <p:cNvPr id="4" name="Slide Number Placeholder 3"/>
+          <p:cNvSpPr>
+            <a:spLocks noGrp="1"/>
+          </p:cNvSpPr>
+          <p:nvPr>
+            <p:ph type="sldNum" idx="5" sz="quarter"/>
+          </p:nvPr>
+        </p:nvSpPr>
+        <p:spPr/>
+      </p:sp>
+    </p:spTree>
+  </p:cSld>
+  <p:clrMapOvr>
+    <a:masterClrMapping/>
+  </p:clrMapOvr>
+</p:notes>
+</file>
+
+<file path=ppt/notesSlides/notesSlide21.xml><?xml version="1.0" encoding="utf-8"?>
+<p:notes xmlns:a="http://schemas.openxmlformats.org/drawingml/2006/main" xmlns:p="http://schemas.openxmlformats.org/presentationml/2006/main" xmlns:r="http://schemas.openxmlformats.org/officeDocument/2006/relationships">
+  <p:cSld>
+    <p:spTree>
+      <p:nvGrpSpPr>
+        <p:cNvPr id="1" name=""/>
+        <p:cNvGrpSpPr/>
+        <p:nvPr/>
+      </p:nvGrpSpPr>
+      <p:grpSpPr>
+        <a:xfrm>
+          <a:off x="0" y="0"/>
+          <a:ext cx="0" cy="0"/>
+          <a:chOff x="0" y="0"/>
+          <a:chExt cx="0" cy="0"/>
+        </a:xfrm>
+      </p:grpSpPr>
+      <p:sp>
+        <p:nvSpPr>
+          <p:cNvPr id="2" name="Slide Image Placeholder 1"/>
+          <p:cNvSpPr>
+            <a:spLocks noGrp="1"/>
+          </p:cNvSpPr>
+          <p:nvPr>
+            <p:ph type="sldImg" idx="2"/>
+          </p:nvPr>
+        </p:nvSpPr>
+        <p:spPr/>
+      </p:sp>
+      <p:sp>
+        <p:nvSpPr>
+          <p:cNvPr id="3" name="Notes Placeholder 2"/>
+          <p:cNvSpPr>
+            <a:spLocks noGrp="1"/>
+          </p:cNvSpPr>
+          <p:nvPr>
+            <p:ph type="body" idx="3" sz="quarter"/>
+          </p:nvPr>
+        </p:nvSpPr>
+        <p:spPr/>
+        <p:txBody>
+          <a:bodyPr/>
+          <a:lstStyle/>
+          <a:p>
+            <a:r>
+              <a:t>Mention limitations honestly.</a:t>
+            </a:r>
+          </a:p>
+        </p:txBody>
+      </p:sp>
+      <p:sp>
+        <p:nvSpPr>
+          <p:cNvPr id="4" name="Slide Number Placeholder 3"/>
+          <p:cNvSpPr>
+            <a:spLocks noGrp="1"/>
+          </p:cNvSpPr>
+          <p:nvPr>
+            <p:ph type="sldNum" idx="5" sz="quarter"/>
+          </p:nvPr>
+        </p:nvSpPr>
+        <p:spPr/>
+      </p:sp>
+    </p:spTree>
+  </p:cSld>
+  <p:clrMapOvr>
+    <a:masterClrMapping/>
+  </p:clrMapOvr>
+</p:notes>
+</file>
+
+<file path=ppt/notesSlides/notesSlide22.xml><?xml version="1.0" encoding="utf-8"?>
+<p:notes xmlns:a="http://schemas.openxmlformats.org/drawingml/2006/main" xmlns:p="http://schemas.openxmlformats.org/presentationml/2006/main" xmlns:r="http://schemas.openxmlformats.org/officeDocument/2006/relationships">
+  <p:cSld>
+    <p:spTree>
+      <p:nvGrpSpPr>
+        <p:cNvPr id="1" name=""/>
+        <p:cNvGrpSpPr/>
+        <p:nvPr/>
+      </p:nvGrpSpPr>
+      <p:grpSpPr>
+        <a:xfrm>
+          <a:off x="0" y="0"/>
+          <a:ext cx="0" cy="0"/>
+          <a:chOff x="0" y="0"/>
+          <a:chExt cx="0" cy="0"/>
+        </a:xfrm>
+      </p:grpSpPr>
+      <p:sp>
+        <p:nvSpPr>
+          <p:cNvPr id="2" name="Slide Image Placeholder 1"/>
+          <p:cNvSpPr>
+            <a:spLocks noGrp="1"/>
+          </p:cNvSpPr>
+          <p:nvPr>
+            <p:ph type="sldImg" idx="2"/>
+          </p:nvPr>
+        </p:nvSpPr>
+        <p:spPr/>
+      </p:sp>
+      <p:sp>
+        <p:nvSpPr>
+          <p:cNvPr id="3" name="Notes Placeholder 2"/>
+          <p:cNvSpPr>
+            <a:spLocks noGrp="1"/>
+          </p:cNvSpPr>
+          <p:nvPr>
+            <p:ph type="body" idx="3" sz="quarter"/>
+          </p:nvPr>
+        </p:nvSpPr>
+        <p:spPr/>
+        <p:txBody>
+          <a:bodyPr/>
+          <a:lstStyle/>
+          <a:p>
+            <a:r>
+              <a:t>Future scope helps report quality.</a:t>
+            </a:r>
+          </a:p>
+        </p:txBody>
+      </p:sp>
+      <p:sp>
+        <p:nvSpPr>
+          <p:cNvPr id="4" name="Slide Number Placeholder 3"/>
+          <p:cNvSpPr>
+            <a:spLocks noGrp="1"/>
+          </p:cNvSpPr>
+          <p:nvPr>
+            <p:ph type="sldNum" idx="5" sz="quarter"/>
+          </p:nvPr>
+        </p:nvSpPr>
+        <p:spPr/>
+      </p:sp>
+    </p:spTree>
+  </p:cSld>
+  <p:clrMapOvr>
+    <a:masterClrMapping/>
+  </p:clrMapOvr>
+</p:notes>
+</file>
+
+<file path=ppt/notesSlides/notesSlide23.xml><?xml version="1.0" encoding="utf-8"?>
+<p:notes xmlns:a="http://schemas.openxmlformats.org/drawingml/2006/main" xmlns:p="http://schemas.openxmlformats.org/presentationml/2006/main" xmlns:r="http://schemas.openxmlformats.org/officeDocument/2006/relationships">
+  <p:cSld>
+    <p:spTree>
+      <p:nvGrpSpPr>
+        <p:cNvPr id="1" name=""/>
+        <p:cNvGrpSpPr/>
+        <p:nvPr/>
+      </p:nvGrpSpPr>
+      <p:grpSpPr>
+        <a:xfrm>
+          <a:off x="0" y="0"/>
+          <a:ext cx="0" cy="0"/>
+          <a:chOff x="0" y="0"/>
+          <a:chExt cx="0" cy="0"/>
+        </a:xfrm>
+      </p:grpSpPr>
+      <p:sp>
+        <p:nvSpPr>
+          <p:cNvPr id="2" name="Slide Image Placeholder 1"/>
+          <p:cNvSpPr>
+            <a:spLocks noGrp="1"/>
+          </p:cNvSpPr>
+          <p:nvPr>
+            <p:ph type="sldImg" idx="2"/>
+          </p:nvPr>
+        </p:nvSpPr>
+        <p:spPr/>
+      </p:sp>
+      <p:sp>
+        <p:nvSpPr>
+          <p:cNvPr id="3" name="Notes Placeholder 2"/>
+          <p:cNvSpPr>
+            <a:spLocks noGrp="1"/>
+          </p:cNvSpPr>
+          <p:nvPr>
+            <p:ph type="body" idx="3" sz="quarter"/>
+          </p:nvPr>
+        </p:nvSpPr>
+        <p:spPr/>
+        <p:txBody>
+          <a:bodyPr/>
+          <a:lstStyle/>
+          <a:p>
+            <a:r>
+              <a:t>Divide the speaking roles.</a:t>
+            </a:r>
+          </a:p>
+        </p:txBody>
+      </p:sp>
+      <p:sp>
+        <p:nvSpPr>
+          <p:cNvPr id="4" name="Slide Number Placeholder 3"/>
+          <p:cNvSpPr>
+            <a:spLocks noGrp="1"/>
+          </p:cNvSpPr>
+          <p:nvPr>
+            <p:ph type="sldNum" idx="5" sz="quarter"/>
+          </p:nvPr>
+        </p:nvSpPr>
+        <p:spPr/>
+      </p:sp>
+    </p:spTree>
+  </p:cSld>
+  <p:clrMapOvr>
+    <a:masterClrMapping/>
+  </p:clrMapOvr>
+</p:notes>
+</file>
+
+<file path=ppt/notesSlides/notesSlide24.xml><?xml version="1.0" encoding="utf-8"?>
+<p:notes xmlns:a="http://schemas.openxmlformats.org/drawingml/2006/main" xmlns:p="http://schemas.openxmlformats.org/presentationml/2006/main" xmlns:r="http://schemas.openxmlformats.org/officeDocument/2006/relationships">
+  <p:cSld>
+    <p:spTree>
+      <p:nvGrpSpPr>
+        <p:cNvPr id="1" name=""/>
+        <p:cNvGrpSpPr/>
+        <p:nvPr/>
+      </p:nvGrpSpPr>
+      <p:grpSpPr>
+        <a:xfrm>
+          <a:off x="0" y="0"/>
+          <a:ext cx="0" cy="0"/>
+          <a:chOff x="0" y="0"/>
+          <a:chExt cx="0" cy="0"/>
+        </a:xfrm>
+      </p:grpSpPr>
+      <p:sp>
+        <p:nvSpPr>
+          <p:cNvPr id="2" name="Slide Image Placeholder 1"/>
+          <p:cNvSpPr>
+            <a:spLocks noGrp="1"/>
+          </p:cNvSpPr>
+          <p:nvPr>
+            <p:ph type="sldImg" idx="2"/>
+          </p:nvPr>
+        </p:nvSpPr>
+        <p:spPr/>
+      </p:sp>
+      <p:sp>
+        <p:nvSpPr>
+          <p:cNvPr id="3" name="Notes Placeholder 2"/>
+          <p:cNvSpPr>
+            <a:spLocks noGrp="1"/>
+          </p:cNvSpPr>
+          <p:nvPr>
+            <p:ph type="body" idx="3" sz="quarter"/>
+          </p:nvPr>
+        </p:nvSpPr>
+        <p:spPr/>
+        <p:txBody>
+          <a:bodyPr/>
+          <a:lstStyle/>
+          <a:p>
+            <a:r>
+              <a:t>End with this conclusion.</a:t>
+            </a:r>
+          </a:p>
+        </p:txBody>
+      </p:sp>
+      <p:sp>
+        <p:nvSpPr>
+          <p:cNvPr id="4" name="Slide Number Placeholder 3"/>
+          <p:cNvSpPr>
+            <a:spLocks noGrp="1"/>
+          </p:cNvSpPr>
+          <p:nvPr>
+            <p:ph type="sldNum" idx="5" sz="quarter"/>
+          </p:nvPr>
+        </p:nvSpPr>
+        <p:spPr/>
+      </p:sp>
+    </p:spTree>
+  </p:cSld>
+  <p:clrMapOvr>
+    <a:masterClrMapping/>
+  </p:clrMapOvr>
+</p:notes>
+</file>
+
+<file path=ppt/notesSlides/notesSlide25.xml><?xml version="1.0" encoding="utf-8"?>
+<p:notes xmlns:a="http://schemas.openxmlformats.org/drawingml/2006/main" xmlns:p="http://schemas.openxmlformats.org/presentationml/2006/main" xmlns:r="http://schemas.openxmlformats.org/officeDocument/2006/relationships">
+  <p:cSld>
+    <p:spTree>
+      <p:nvGrpSpPr>
+        <p:cNvPr id="1" name=""/>
+        <p:cNvGrpSpPr/>
+        <p:nvPr/>
+      </p:nvGrpSpPr>
+      <p:grpSpPr>
+        <a:xfrm>
+          <a:off x="0" y="0"/>
+          <a:ext cx="0" cy="0"/>
+          <a:chOff x="0" y="0"/>
+          <a:chExt cx="0" cy="0"/>
+        </a:xfrm>
+      </p:grpSpPr>
+      <p:sp>
+        <p:nvSpPr>
+          <p:cNvPr id="2" name="Slide Image Placeholder 1"/>
+          <p:cNvSpPr>
+            <a:spLocks noGrp="1"/>
+          </p:cNvSpPr>
+          <p:nvPr>
+            <p:ph type="sldImg" idx="2"/>
+          </p:nvPr>
+        </p:nvSpPr>
+        <p:spPr/>
+      </p:sp>
+      <p:sp>
+        <p:nvSpPr>
+          <p:cNvPr id="3" name="Notes Placeholder 2"/>
+          <p:cNvSpPr>
+            <a:spLocks noGrp="1"/>
+          </p:cNvSpPr>
+          <p:nvPr>
+            <p:ph type="body" idx="3" sz="quarter"/>
+          </p:nvPr>
+        </p:nvSpPr>
+        <p:spPr/>
+        <p:txBody>
+          <a:bodyPr/>
+          <a:lstStyle/>
+          <a:p>
+            <a:r>
+              <a:t>Keep this as backup if commands are needed during presentation.</a:t>
             </a:r>
           </a:p>
         </p:txBody>
@@ -1147,7 +1786,7 @@
           <a:lstStyle/>
           <a:p>
             <a:r>
-              <a:t>Explain the problem in simple language: readable packets are unsafe.</a:t>
+              <a:t>This slide directly maps to the professor's rules.</a:t>
             </a:r>
           </a:p>
         </p:txBody>
@@ -1217,7 +1856,7 @@
           <a:lstStyle/>
           <a:p>
             <a:r>
-              <a:t>Tanishk can explain this slide.</a:t>
+              <a:t>Explain the real-world need for encryption.</a:t>
             </a:r>
           </a:p>
         </p:txBody>
@@ -1287,7 +1926,7 @@
           <a:lstStyle/>
           <a:p>
             <a:r>
-              <a:t>Aastha can explain confidentiality and encryption.</a:t>
+              <a:t>Tanishk can present this.</a:t>
             </a:r>
           </a:p>
         </p:txBody>
@@ -1357,7 +1996,7 @@
           <a:lstStyle/>
           <a:p>
             <a:r>
-              <a:t>Mention that Ncat is used because classical Netcat has no encryption.</a:t>
+              <a:t>Clarify why Ncat appears in the encrypted part.</a:t>
             </a:r>
           </a:p>
         </p:txBody>
@@ -1427,7 +2066,7 @@
           <a:lstStyle/>
           <a:p>
             <a:r>
-              <a:t>This is the complete practical demonstration in one slide.</a:t>
+              <a:t>Aastha can present the security theory.</a:t>
             </a:r>
           </a:p>
         </p:txBody>
@@ -1497,7 +2136,7 @@
           <a:lstStyle/>
           <a:p>
             <a:r>
-              <a:t>This is the unsafe channel demonstration.</a:t>
+              <a:t>List tools and their roles.</a:t>
             </a:r>
           </a:p>
         </p:txBody>
@@ -1567,7 +2206,7 @@
           <a:lstStyle/>
           <a:p>
             <a:r>
-              <a:t>Aditi can explain that this is the attack/demo of cryptanalysis.</a:t>
+              <a:t>Explain the three roles.</a:t>
             </a:r>
           </a:p>
         </p:txBody>
@@ -4573,23 +5212,65 @@
         <p:nvPr/>
       </p:nvGrpSpPr>
       <p:grpSpPr/>
-      <p:sp>
-        <p:nvSpPr>
-          <p:cNvPr id="2" name="Title 1"/>
-          <p:cNvSpPr>
-            <a:spLocks noGrp="1"/>
-          </p:cNvSpPr>
-          <p:nvPr>
-            <p:ph type="ctrTitle"/>
-          </p:nvPr>
-        </p:nvSpPr>
-        <p:spPr/>
-        <p:txBody>
-          <a:bodyPr/>
-          <a:lstStyle/>
-          <a:p>
-            <a:pPr>
-              <a:defRPr sz="3400"/>
+      <p:pic>
+        <p:nvPicPr>
+          <p:cNvPr id="2" name="Picture 1" descr="network_security_background.png"/>
+          <p:cNvPicPr>
+            <a:picLocks noChangeAspect="1"/>
+          </p:cNvPicPr>
+          <p:nvPr/>
+        </p:nvPicPr>
+        <p:blipFill>
+          <a:blip r:embed="rId2"/>
+          <a:stretch>
+            <a:fillRect/>
+          </a:stretch>
+        </p:blipFill>
+        <p:spPr>
+          <a:xfrm>
+            <a:off x="0" y="0"/>
+            <a:ext cx="12191695" cy="6858000"/>
+          </a:xfrm>
+          <a:prstGeom prst="rect">
+            <a:avLst/>
+          </a:prstGeom>
+        </p:spPr>
+      </p:pic>
+      <p:sp>
+        <p:nvSpPr>
+          <p:cNvPr id="3" name="TextBox 2"/>
+          <p:cNvSpPr txBox="1"/>
+          <p:nvPr/>
+        </p:nvSpPr>
+        <p:spPr>
+          <a:xfrm>
+            <a:off x="640080" y="1417320"/>
+            <a:ext cx="10972800" cy="1508760"/>
+          </a:xfrm>
+          <a:prstGeom prst="rect">
+            <a:avLst/>
+          </a:prstGeom>
+          <a:solidFill>
+            <a:srgbClr val="03101F"/>
+          </a:solidFill>
+          <a:ln>
+            <a:solidFill>
+              <a:srgbClr val="57D7FF"/>
+            </a:solidFill>
+          </a:ln>
+        </p:spPr>
+        <p:txBody>
+          <a:bodyPr wrap="none" anchor="ctr">
+            <a:spAutoFit/>
+          </a:bodyPr>
+          <a:lstStyle/>
+          <a:p>
+            <a:pPr algn="ctr">
+              <a:defRPr b="1" sz="3100">
+                <a:solidFill>
+                  <a:srgbClr val="ECFAFF"/>
+                </a:solidFill>
+              </a:defRPr>
             </a:pPr>
             <a:r>
               <a:t>Secure Data Transmission over Netcat: Demonstrating Confidentiality through Plaintext vs Encrypted Channels</a:t>
@@ -4599,31 +5280,41 @@
       </p:sp>
       <p:sp>
         <p:nvSpPr>
-          <p:cNvPr id="3" name="Subtitle 2"/>
-          <p:cNvSpPr>
-            <a:spLocks noGrp="1"/>
-          </p:cNvSpPr>
-          <p:nvPr>
-            <p:ph type="subTitle" idx="1"/>
-          </p:nvPr>
-        </p:nvSpPr>
-        <p:spPr/>
-        <p:txBody>
-          <a:bodyPr/>
-          <a:lstStyle/>
-          <a:p>
+          <p:cNvPr id="4" name="TextBox 3"/>
+          <p:cNvSpPr txBox="1"/>
+          <p:nvPr/>
+        </p:nvSpPr>
+        <p:spPr>
+          <a:xfrm>
+            <a:off x="1554480" y="3246120"/>
+            <a:ext cx="9144000" cy="914400"/>
+          </a:xfrm>
+          <a:prstGeom prst="rect">
+            <a:avLst/>
+          </a:prstGeom>
+          <a:solidFill>
+            <a:srgbClr val="03101F"/>
+          </a:solidFill>
+        </p:spPr>
+        <p:txBody>
+          <a:bodyPr wrap="none">
+            <a:spAutoFit/>
+          </a:bodyPr>
+          <a:lstStyle/>
+          <a:p>
+            <a:pPr algn="ctr">
+              <a:defRPr sz="2100">
+                <a:solidFill>
+                  <a:srgbClr val="DCF4FF"/>
+                </a:solidFill>
+              </a:defRPr>
+            </a:pPr>
             <a:r>
               <a:t>Practical Exploration of Cryptography / Security Tools</a:t>
             </a:r>
-          </a:p>
-          <a:p>
-            <a:r>
-              <a:t>Selected Tool: Netcat / Ncat</a:t>
-            </a:r>
-          </a:p>
-          <a:p>
-            <a:r>
-              <a:t>Team: Tanishk, Aastha, Aditi</a:t>
+            <a:br/>
+            <a:r>
+              <a:t>Selected Tool: Netcat / Ncat | Team: Tanishk, Aastha, Aditi</a:t>
             </a:r>
           </a:p>
         </p:txBody>
@@ -4646,85 +5337,173 @@
         <p:nvPr/>
       </p:nvGrpSpPr>
       <p:grpSpPr/>
-      <p:sp>
-        <p:nvSpPr>
-          <p:cNvPr id="2" name="Title 1"/>
-          <p:cNvSpPr>
-            <a:spLocks noGrp="1"/>
-          </p:cNvSpPr>
-          <p:nvPr>
-            <p:ph type="title"/>
-          </p:nvPr>
-        </p:nvSpPr>
-        <p:spPr/>
-        <p:txBody>
-          <a:bodyPr/>
-          <a:lstStyle/>
-          <a:p>
-            <a:pPr>
-              <a:defRPr b="1" sz="3000">
-                <a:solidFill>
-                  <a:srgbClr val="1F4E79"/>
-                </a:solidFill>
-              </a:defRPr>
-            </a:pPr>
-            <a:r>
-              <a:t>Experiment 2: Encrypted Ncat SSL</a:t>
-            </a:r>
-          </a:p>
-        </p:txBody>
-      </p:sp>
-      <p:sp>
-        <p:nvSpPr>
-          <p:cNvPr id="3" name="TextBox 2"/>
-          <p:cNvSpPr txBox="1"/>
+      <p:pic>
+        <p:nvPicPr>
+          <p:cNvPr id="2" name="Picture 1" descr="network_security_background.png"/>
+          <p:cNvPicPr>
+            <a:picLocks noChangeAspect="1"/>
+          </p:cNvPicPr>
           <p:nvPr/>
-        </p:nvSpPr>
+        </p:nvPicPr>
+        <p:blipFill>
+          <a:blip r:embed="rId2"/>
+          <a:stretch>
+            <a:fillRect/>
+          </a:stretch>
+        </p:blipFill>
         <p:spPr>
           <a:xfrm>
-            <a:off x="731520" y="1417320"/>
-            <a:ext cx="7955279" cy="4389120"/>
+            <a:off x="0" y="0"/>
+            <a:ext cx="12191695" cy="6858000"/>
           </a:xfrm>
           <a:prstGeom prst="rect">
             <a:avLst/>
           </a:prstGeom>
-          <a:noFill/>
         </p:spPr>
-        <p:txBody>
-          <a:bodyPr wrap="square">
+      </p:pic>
+      <p:sp>
+        <p:nvSpPr>
+          <p:cNvPr id="3" name="TextBox 2"/>
+          <p:cNvSpPr txBox="1"/>
+          <p:nvPr/>
+        </p:nvSpPr>
+        <p:spPr>
+          <a:xfrm>
+            <a:off x="502920" y="301752"/>
+            <a:ext cx="11155680" cy="658368"/>
+          </a:xfrm>
+          <a:prstGeom prst="rect">
+            <a:avLst/>
+          </a:prstGeom>
+          <a:solidFill>
+            <a:srgbClr val="040F1E"/>
+          </a:solidFill>
+          <a:ln>
+            <a:solidFill>
+              <a:srgbClr val="4BCDFF"/>
+            </a:solidFill>
+          </a:ln>
+        </p:spPr>
+        <p:txBody>
+          <a:bodyPr wrap="none">
             <a:spAutoFit/>
           </a:bodyPr>
           <a:lstStyle/>
           <a:p>
             <a:pPr>
-              <a:defRPr sz="2200"/>
-            </a:pPr>
-            <a:r>
-              <a:t>Generate certificate using OpenSSL.</a:t>
-            </a:r>
-          </a:p>
-          <a:p>
-            <a:pPr>
-              <a:defRPr sz="2200"/>
-            </a:pPr>
-            <a:r>
-              <a:t>Receiver: ncat --ssl --ssl-cert server.crt --ssl-key server.key -lvnp 4445</a:t>
-            </a:r>
-          </a:p>
-          <a:p>
-            <a:pPr>
-              <a:defRPr sz="2200"/>
-            </a:pPr>
-            <a:r>
-              <a:t>Sender: ncat --ssl 127.0.0.1 4445 &lt; secret_message.txt</a:t>
-            </a:r>
-          </a:p>
-          <a:p>
-            <a:pPr>
-              <a:defRPr sz="2200"/>
-            </a:pPr>
-            <a:r>
-              <a:t>Wireshark filter: tcp.port == 4445</a:t>
+              <a:defRPr b="1" sz="2500">
+                <a:solidFill>
+                  <a:srgbClr val="E8F8FF"/>
+                </a:solidFill>
+              </a:defRPr>
+            </a:pPr>
+            <a:r>
+              <a:t>Demo Setup</a:t>
+            </a:r>
+          </a:p>
+        </p:txBody>
+      </p:sp>
+      <p:sp>
+        <p:nvSpPr>
+          <p:cNvPr id="4" name="TextBox 3"/>
+          <p:cNvSpPr txBox="1"/>
+          <p:nvPr/>
+        </p:nvSpPr>
+        <p:spPr>
+          <a:xfrm>
+            <a:off x="685800" y="1234440"/>
+            <a:ext cx="10835640" cy="5074920"/>
+          </a:xfrm>
+          <a:prstGeom prst="rect">
+            <a:avLst/>
+          </a:prstGeom>
+          <a:solidFill>
+            <a:srgbClr val="051222"/>
+          </a:solidFill>
+          <a:ln>
+            <a:solidFill>
+              <a:srgbClr val="2282B4"/>
+            </a:solidFill>
+          </a:ln>
+        </p:spPr>
+        <p:txBody>
+          <a:bodyPr wrap="square" lIns="228600" rIns="201168" tIns="164592">
+            <a:spAutoFit/>
+          </a:bodyPr>
+          <a:lstStyle/>
+          <a:p>
+            <a:pPr>
+              <a:spcAft>
+                <a:spcPts val="600"/>
+              </a:spcAft>
+              <a:defRPr sz="2000">
+                <a:solidFill>
+                  <a:srgbClr val="ECFAFF"/>
+                </a:solidFill>
+              </a:defRPr>
+            </a:pPr>
+            <a:r>
+              <a:t>Use one laptop with two terminals for easiest demo.</a:t>
+            </a:r>
+          </a:p>
+          <a:p>
+            <a:pPr>
+              <a:spcAft>
+                <a:spcPts val="600"/>
+              </a:spcAft>
+              <a:defRPr sz="2000">
+                <a:solidFill>
+                  <a:srgbClr val="ECFAFF"/>
+                </a:solidFill>
+              </a:defRPr>
+            </a:pPr>
+            <a:r>
+              <a:t>Use 127.0.0.1 when sender and receiver are on same laptop.</a:t>
+            </a:r>
+          </a:p>
+          <a:p>
+            <a:pPr>
+              <a:spcAft>
+                <a:spcPts val="600"/>
+              </a:spcAft>
+              <a:defRPr sz="2000">
+                <a:solidFill>
+                  <a:srgbClr val="ECFAFF"/>
+                </a:solidFill>
+              </a:defRPr>
+            </a:pPr>
+            <a:r>
+              <a:t>Use port 4444 for plaintext Netcat.</a:t>
+            </a:r>
+          </a:p>
+          <a:p>
+            <a:pPr>
+              <a:spcAft>
+                <a:spcPts val="600"/>
+              </a:spcAft>
+              <a:defRPr sz="2000">
+                <a:solidFill>
+                  <a:srgbClr val="ECFAFF"/>
+                </a:solidFill>
+              </a:defRPr>
+            </a:pPr>
+            <a:r>
+              <a:t>Use port 4445 for encrypted Ncat SSL.</a:t>
+            </a:r>
+          </a:p>
+          <a:p>
+            <a:pPr>
+              <a:spcAft>
+                <a:spcPts val="600"/>
+              </a:spcAft>
+              <a:defRPr sz="2000">
+                <a:solidFill>
+                  <a:srgbClr val="ECFAFF"/>
+                </a:solidFill>
+              </a:defRPr>
+            </a:pPr>
+            <a:r>
+              <a:t>Open Wireshark before sending data to capture packets.</a:t>
             </a:r>
           </a:p>
         </p:txBody>
@@ -4747,85 +5526,158 @@
         <p:nvPr/>
       </p:nvGrpSpPr>
       <p:grpSpPr/>
-      <p:sp>
-        <p:nvSpPr>
-          <p:cNvPr id="2" name="Title 1"/>
-          <p:cNvSpPr>
-            <a:spLocks noGrp="1"/>
-          </p:cNvSpPr>
-          <p:nvPr>
-            <p:ph type="title"/>
-          </p:nvPr>
-        </p:nvSpPr>
-        <p:spPr/>
-        <p:txBody>
-          <a:bodyPr/>
-          <a:lstStyle/>
-          <a:p>
-            <a:pPr>
-              <a:defRPr b="1" sz="3000">
-                <a:solidFill>
-                  <a:srgbClr val="1F4E79"/>
-                </a:solidFill>
-              </a:defRPr>
-            </a:pPr>
-            <a:r>
-              <a:t>Encrypted Channel Observation</a:t>
-            </a:r>
-          </a:p>
-        </p:txBody>
-      </p:sp>
-      <p:sp>
-        <p:nvSpPr>
-          <p:cNvPr id="3" name="TextBox 2"/>
-          <p:cNvSpPr txBox="1"/>
+      <p:pic>
+        <p:nvPicPr>
+          <p:cNvPr id="2" name="Picture 1" descr="network_security_background.png"/>
+          <p:cNvPicPr>
+            <a:picLocks noChangeAspect="1"/>
+          </p:cNvPicPr>
           <p:nvPr/>
-        </p:nvSpPr>
+        </p:nvPicPr>
+        <p:blipFill>
+          <a:blip r:embed="rId2"/>
+          <a:stretch>
+            <a:fillRect/>
+          </a:stretch>
+        </p:blipFill>
         <p:spPr>
           <a:xfrm>
-            <a:off x="731520" y="1417320"/>
-            <a:ext cx="7955279" cy="4389120"/>
+            <a:off x="0" y="0"/>
+            <a:ext cx="12191695" cy="6858000"/>
           </a:xfrm>
           <a:prstGeom prst="rect">
             <a:avLst/>
           </a:prstGeom>
-          <a:noFill/>
         </p:spPr>
-        <p:txBody>
-          <a:bodyPr wrap="square">
+      </p:pic>
+      <p:sp>
+        <p:nvSpPr>
+          <p:cNvPr id="3" name="TextBox 2"/>
+          <p:cNvSpPr txBox="1"/>
+          <p:nvPr/>
+        </p:nvSpPr>
+        <p:spPr>
+          <a:xfrm>
+            <a:off x="502920" y="301752"/>
+            <a:ext cx="11155680" cy="658368"/>
+          </a:xfrm>
+          <a:prstGeom prst="rect">
+            <a:avLst/>
+          </a:prstGeom>
+          <a:solidFill>
+            <a:srgbClr val="040F1E"/>
+          </a:solidFill>
+          <a:ln>
+            <a:solidFill>
+              <a:srgbClr val="4BCDFF"/>
+            </a:solidFill>
+          </a:ln>
+        </p:spPr>
+        <p:txBody>
+          <a:bodyPr wrap="none">
             <a:spAutoFit/>
           </a:bodyPr>
           <a:lstStyle/>
           <a:p>
             <a:pPr>
-              <a:defRPr sz="2200"/>
-            </a:pPr>
-            <a:r>
-              <a:t>Receiver still gets the correct message.</a:t>
-            </a:r>
-          </a:p>
-          <a:p>
-            <a:pPr>
-              <a:defRPr sz="2200"/>
-            </a:pPr>
-            <a:r>
-              <a:t>Wireshark does not show the readable message.</a:t>
-            </a:r>
-          </a:p>
-          <a:p>
-            <a:pPr>
-              <a:defRPr sz="2200"/>
-            </a:pPr>
-            <a:r>
-              <a:t>Captured traffic appears as encrypted TLS/SSL data.</a:t>
-            </a:r>
-          </a:p>
-          <a:p>
-            <a:pPr>
-              <a:defRPr sz="2200"/>
-            </a:pPr>
-            <a:r>
-              <a:t>Confidentiality is protected.</a:t>
+              <a:defRPr b="1" sz="2500">
+                <a:solidFill>
+                  <a:srgbClr val="E8F8FF"/>
+                </a:solidFill>
+              </a:defRPr>
+            </a:pPr>
+            <a:r>
+              <a:t>Create Secret Message File</a:t>
+            </a:r>
+          </a:p>
+        </p:txBody>
+      </p:sp>
+      <p:sp>
+        <p:nvSpPr>
+          <p:cNvPr id="4" name="TextBox 3"/>
+          <p:cNvSpPr txBox="1"/>
+          <p:nvPr/>
+        </p:nvSpPr>
+        <p:spPr>
+          <a:xfrm>
+            <a:off x="685800" y="1234440"/>
+            <a:ext cx="10835640" cy="5074920"/>
+          </a:xfrm>
+          <a:prstGeom prst="rect">
+            <a:avLst/>
+          </a:prstGeom>
+          <a:solidFill>
+            <a:srgbClr val="051222"/>
+          </a:solidFill>
+          <a:ln>
+            <a:solidFill>
+              <a:srgbClr val="2282B4"/>
+            </a:solidFill>
+          </a:ln>
+        </p:spPr>
+        <p:txBody>
+          <a:bodyPr wrap="square" lIns="228600" rIns="201168" tIns="164592">
+            <a:spAutoFit/>
+          </a:bodyPr>
+          <a:lstStyle/>
+          <a:p>
+            <a:pPr>
+              <a:spcAft>
+                <a:spcPts val="600"/>
+              </a:spcAft>
+              <a:defRPr sz="2000">
+                <a:solidFill>
+                  <a:srgbClr val="ECFAFF"/>
+                </a:solidFill>
+              </a:defRPr>
+            </a:pPr>
+            <a:r>
+              <a:t>The same file is used in both experiments.</a:t>
+            </a:r>
+          </a:p>
+          <a:p>
+            <a:pPr>
+              <a:spcAft>
+                <a:spcPts val="600"/>
+              </a:spcAft>
+              <a:defRPr sz="2000">
+                <a:solidFill>
+                  <a:srgbClr val="ECFAFF"/>
+                </a:solidFill>
+              </a:defRPr>
+            </a:pPr>
+            <a:r>
+              <a:t>This keeps the comparison fair.</a:t>
+            </a:r>
+          </a:p>
+          <a:p>
+            <a:pPr>
+              <a:spcAft>
+                <a:spcPts val="600"/>
+              </a:spcAft>
+              <a:defRPr sz="2000">
+                <a:solidFill>
+                  <a:srgbClr val="ECFAFF"/>
+                </a:solidFill>
+              </a:defRPr>
+            </a:pPr>
+            <a:r>
+              <a:t>If this text appears in Wireshark during plaintext transfer, confidentiality is broken.</a:t>
+            </a:r>
+          </a:p>
+          <a:p>
+            <a:pPr>
+              <a:spcAft>
+                <a:spcPts val="600"/>
+              </a:spcAft>
+              <a:defRPr sz="2000">
+                <a:solidFill>
+                  <a:srgbClr val="ECFAFF"/>
+                </a:solidFill>
+              </a:defRPr>
+            </a:pPr>
+            <a:r>
+              <a:t>If it does not appear during encrypted transfer, confidentiality is protected.</a:t>
             </a:r>
           </a:p>
         </p:txBody>
@@ -4848,343 +5700,177 @@
         <p:nvPr/>
       </p:nvGrpSpPr>
       <p:grpSpPr/>
-      <p:sp>
-        <p:nvSpPr>
-          <p:cNvPr id="2" name="Title 1"/>
-          <p:cNvSpPr>
-            <a:spLocks noGrp="1"/>
-          </p:cNvSpPr>
-          <p:nvPr>
-            <p:ph type="title"/>
-          </p:nvPr>
-        </p:nvSpPr>
-        <p:spPr/>
-        <p:txBody>
-          <a:bodyPr/>
-          <a:lstStyle/>
-          <a:p>
-            <a:pPr>
-              <a:defRPr b="1" sz="3000">
-                <a:solidFill>
-                  <a:srgbClr val="1F4E79"/>
-                </a:solidFill>
-              </a:defRPr>
-            </a:pPr>
-            <a:r>
-              <a:t>Plaintext vs Encrypted Comparison</a:t>
-            </a:r>
-          </a:p>
-        </p:txBody>
-      </p:sp>
-      <p:graphicFrame>
-        <p:nvGraphicFramePr>
-          <p:cNvPr id="3" name="Table 2"/>
-          <p:cNvGraphicFramePr>
-            <a:graphicFrameLocks noGrp="1"/>
-          </p:cNvGraphicFramePr>
+      <p:pic>
+        <p:nvPicPr>
+          <p:cNvPr id="2" name="Picture 1" descr="network_security_background.png"/>
+          <p:cNvPicPr>
+            <a:picLocks noChangeAspect="1"/>
+          </p:cNvPicPr>
           <p:nvPr/>
-        </p:nvGraphicFramePr>
-        <p:xfrm>
-          <a:off x="640080" y="1325880"/>
-          <a:ext cx="10972800" cy="4023360"/>
-        </p:xfrm>
-        <a:graphic>
-          <a:graphicData uri="http://schemas.openxmlformats.org/drawingml/2006/table">
-            <a:tbl>
-              <a:tblPr firstRow="1" bandRow="1">
-                <a:tableStyleId>{5C22544A-7EE6-4342-B048-85BDC9FD1C3A}</a:tableStyleId>
-              </a:tblPr>
-              <a:tblGrid>
-                <a:gridCol w="3657600"/>
-                <a:gridCol w="3657600"/>
-                <a:gridCol w="3657600"/>
-              </a:tblGrid>
-              <a:tr h="670560">
-                <a:tc>
-                  <a:txBody>
-                    <a:bodyPr/>
-                    <a:lstStyle/>
-                    <a:p>
-                      <a:pPr>
-                        <a:defRPr sz="1600"/>
-                      </a:pPr>
-                      <a:r>
-                        <a:t>Feature</a:t>
-                      </a:r>
-                    </a:p>
-                  </a:txBody>
-                  <a:tcPr/>
-                </a:tc>
-                <a:tc>
-                  <a:txBody>
-                    <a:bodyPr/>
-                    <a:lstStyle/>
-                    <a:p>
-                      <a:pPr>
-                        <a:defRPr sz="1600"/>
-                      </a:pPr>
-                      <a:r>
-                        <a:t>Plaintext Netcat</a:t>
-                      </a:r>
-                    </a:p>
-                  </a:txBody>
-                  <a:tcPr/>
-                </a:tc>
-                <a:tc>
-                  <a:txBody>
-                    <a:bodyPr/>
-                    <a:lstStyle/>
-                    <a:p>
-                      <a:pPr>
-                        <a:defRPr sz="1600"/>
-                      </a:pPr>
-                      <a:r>
-                        <a:t>Encrypted Ncat SSL</a:t>
-                      </a:r>
-                    </a:p>
-                  </a:txBody>
-                  <a:tcPr/>
-                </a:tc>
-              </a:tr>
-              <a:tr h="670560">
-                <a:tc>
-                  <a:txBody>
-                    <a:bodyPr/>
-                    <a:lstStyle/>
-                    <a:p>
-                      <a:pPr>
-                        <a:defRPr sz="1600"/>
-                      </a:pPr>
-                      <a:r>
-                        <a:t>Port</a:t>
-                      </a:r>
-                    </a:p>
-                  </a:txBody>
-                  <a:tcPr/>
-                </a:tc>
-                <a:tc>
-                  <a:txBody>
-                    <a:bodyPr/>
-                    <a:lstStyle/>
-                    <a:p>
-                      <a:pPr>
-                        <a:defRPr sz="1600"/>
-                      </a:pPr>
-                      <a:r>
-                        <a:t>4444</a:t>
-                      </a:r>
-                    </a:p>
-                  </a:txBody>
-                  <a:tcPr/>
-                </a:tc>
-                <a:tc>
-                  <a:txBody>
-                    <a:bodyPr/>
-                    <a:lstStyle/>
-                    <a:p>
-                      <a:pPr>
-                        <a:defRPr sz="1600"/>
-                      </a:pPr>
-                      <a:r>
-                        <a:t>4445</a:t>
-                      </a:r>
-                    </a:p>
-                  </a:txBody>
-                  <a:tcPr/>
-                </a:tc>
-              </a:tr>
-              <a:tr h="670560">
-                <a:tc>
-                  <a:txBody>
-                    <a:bodyPr/>
-                    <a:lstStyle/>
-                    <a:p>
-                      <a:pPr>
-                        <a:defRPr sz="1600"/>
-                      </a:pPr>
-                      <a:r>
-                        <a:t>Readable in Wireshark</a:t>
-                      </a:r>
-                    </a:p>
-                  </a:txBody>
-                  <a:tcPr/>
-                </a:tc>
-                <a:tc>
-                  <a:txBody>
-                    <a:bodyPr/>
-                    <a:lstStyle/>
-                    <a:p>
-                      <a:pPr>
-                        <a:defRPr sz="1600"/>
-                      </a:pPr>
-                      <a:r>
-                        <a:t>Yes</a:t>
-                      </a:r>
-                    </a:p>
-                  </a:txBody>
-                  <a:tcPr/>
-                </a:tc>
-                <a:tc>
-                  <a:txBody>
-                    <a:bodyPr/>
-                    <a:lstStyle/>
-                    <a:p>
-                      <a:pPr>
-                        <a:defRPr sz="1600"/>
-                      </a:pPr>
-                      <a:r>
-                        <a:t>No</a:t>
-                      </a:r>
-                    </a:p>
-                  </a:txBody>
-                  <a:tcPr/>
-                </a:tc>
-              </a:tr>
-              <a:tr h="670560">
-                <a:tc>
-                  <a:txBody>
-                    <a:bodyPr/>
-                    <a:lstStyle/>
-                    <a:p>
-                      <a:pPr>
-                        <a:defRPr sz="1600"/>
-                      </a:pPr>
-                      <a:r>
-                        <a:t>Confidentiality</a:t>
-                      </a:r>
-                    </a:p>
-                  </a:txBody>
-                  <a:tcPr/>
-                </a:tc>
-                <a:tc>
-                  <a:txBody>
-                    <a:bodyPr/>
-                    <a:lstStyle/>
-                    <a:p>
-                      <a:pPr>
-                        <a:defRPr sz="1600"/>
-                      </a:pPr>
-                      <a:r>
-                        <a:t>Not protected</a:t>
-                      </a:r>
-                    </a:p>
-                  </a:txBody>
-                  <a:tcPr/>
-                </a:tc>
-                <a:tc>
-                  <a:txBody>
-                    <a:bodyPr/>
-                    <a:lstStyle/>
-                    <a:p>
-                      <a:pPr>
-                        <a:defRPr sz="1600"/>
-                      </a:pPr>
-                      <a:r>
-                        <a:t>Protected</a:t>
-                      </a:r>
-                    </a:p>
-                  </a:txBody>
-                  <a:tcPr/>
-                </a:tc>
-              </a:tr>
-              <a:tr h="670560">
-                <a:tc>
-                  <a:txBody>
-                    <a:bodyPr/>
-                    <a:lstStyle/>
-                    <a:p>
-                      <a:pPr>
-                        <a:defRPr sz="1600"/>
-                      </a:pPr>
-                      <a:r>
-                        <a:t>Attacker can read</a:t>
-                      </a:r>
-                    </a:p>
-                  </a:txBody>
-                  <a:tcPr/>
-                </a:tc>
-                <a:tc>
-                  <a:txBody>
-                    <a:bodyPr/>
-                    <a:lstStyle/>
-                    <a:p>
-                      <a:pPr>
-                        <a:defRPr sz="1600"/>
-                      </a:pPr>
-                      <a:r>
-                        <a:t>Yes</a:t>
-                      </a:r>
-                    </a:p>
-                  </a:txBody>
-                  <a:tcPr/>
-                </a:tc>
-                <a:tc>
-                  <a:txBody>
-                    <a:bodyPr/>
-                    <a:lstStyle/>
-                    <a:p>
-                      <a:pPr>
-                        <a:defRPr sz="1600"/>
-                      </a:pPr>
-                      <a:r>
-                        <a:t>No</a:t>
-                      </a:r>
-                    </a:p>
-                  </a:txBody>
-                  <a:tcPr/>
-                </a:tc>
-              </a:tr>
-              <a:tr h="670560">
-                <a:tc>
-                  <a:txBody>
-                    <a:bodyPr/>
-                    <a:lstStyle/>
-                    <a:p>
-                      <a:pPr>
-                        <a:defRPr sz="1600"/>
-                      </a:pPr>
-                      <a:r>
-                        <a:t>Use for sensitive data</a:t>
-                      </a:r>
-                    </a:p>
-                  </a:txBody>
-                  <a:tcPr/>
-                </a:tc>
-                <a:tc>
-                  <a:txBody>
-                    <a:bodyPr/>
-                    <a:lstStyle/>
-                    <a:p>
-                      <a:pPr>
-                        <a:defRPr sz="1600"/>
-                      </a:pPr>
-                      <a:r>
-                        <a:t>Unsafe</a:t>
-                      </a:r>
-                    </a:p>
-                  </a:txBody>
-                  <a:tcPr/>
-                </a:tc>
-                <a:tc>
-                  <a:txBody>
-                    <a:bodyPr/>
-                    <a:lstStyle/>
-                    <a:p>
-                      <a:pPr>
-                        <a:defRPr sz="1600"/>
-                      </a:pPr>
-                      <a:r>
-                        <a:t>Safer</a:t>
-                      </a:r>
-                    </a:p>
-                  </a:txBody>
-                  <a:tcPr/>
-                </a:tc>
-              </a:tr>
-            </a:tbl>
-          </a:graphicData>
-        </a:graphic>
-      </p:graphicFrame>
+        </p:nvPicPr>
+        <p:blipFill>
+          <a:blip r:embed="rId2"/>
+          <a:stretch>
+            <a:fillRect/>
+          </a:stretch>
+        </p:blipFill>
+        <p:spPr>
+          <a:xfrm>
+            <a:off x="0" y="0"/>
+            <a:ext cx="12191695" cy="6858000"/>
+          </a:xfrm>
+          <a:prstGeom prst="rect">
+            <a:avLst/>
+          </a:prstGeom>
+        </p:spPr>
+      </p:pic>
+      <p:sp>
+        <p:nvSpPr>
+          <p:cNvPr id="3" name="TextBox 2"/>
+          <p:cNvSpPr txBox="1"/>
+          <p:nvPr/>
+        </p:nvSpPr>
+        <p:spPr>
+          <a:xfrm>
+            <a:off x="502920" y="301752"/>
+            <a:ext cx="11155680" cy="658368"/>
+          </a:xfrm>
+          <a:prstGeom prst="rect">
+            <a:avLst/>
+          </a:prstGeom>
+          <a:solidFill>
+            <a:srgbClr val="040F1E"/>
+          </a:solidFill>
+          <a:ln>
+            <a:solidFill>
+              <a:srgbClr val="4BCDFF"/>
+            </a:solidFill>
+          </a:ln>
+        </p:spPr>
+        <p:txBody>
+          <a:bodyPr wrap="none">
+            <a:spAutoFit/>
+          </a:bodyPr>
+          <a:lstStyle/>
+          <a:p>
+            <a:pPr>
+              <a:defRPr b="1" sz="2500">
+                <a:solidFill>
+                  <a:srgbClr val="E8F8FF"/>
+                </a:solidFill>
+              </a:defRPr>
+            </a:pPr>
+            <a:r>
+              <a:t>Plaintext Experiment Commands</a:t>
+            </a:r>
+          </a:p>
+        </p:txBody>
+      </p:sp>
+      <p:sp>
+        <p:nvSpPr>
+          <p:cNvPr id="4" name="TextBox 3"/>
+          <p:cNvSpPr txBox="1"/>
+          <p:nvPr/>
+        </p:nvSpPr>
+        <p:spPr>
+          <a:xfrm>
+            <a:off x="685800" y="1234440"/>
+            <a:ext cx="10835640" cy="5074920"/>
+          </a:xfrm>
+          <a:prstGeom prst="rect">
+            <a:avLst/>
+          </a:prstGeom>
+          <a:solidFill>
+            <a:srgbClr val="051222"/>
+          </a:solidFill>
+          <a:ln>
+            <a:solidFill>
+              <a:srgbClr val="2282B4"/>
+            </a:solidFill>
+          </a:ln>
+        </p:spPr>
+        <p:txBody>
+          <a:bodyPr wrap="square" lIns="228600" rIns="201168" tIns="164592">
+            <a:spAutoFit/>
+          </a:bodyPr>
+          <a:lstStyle/>
+          <a:p>
+            <a:pPr>
+              <a:spcAft>
+                <a:spcPts val="600"/>
+              </a:spcAft>
+              <a:defRPr sz="2000">
+                <a:solidFill>
+                  <a:srgbClr val="ECFAFF"/>
+                </a:solidFill>
+              </a:defRPr>
+            </a:pPr>
+            <a:r>
+              <a:t>Receiver: nc -lvnp 4444 &gt; received_plain.txt</a:t>
+            </a:r>
+          </a:p>
+          <a:p>
+            <a:pPr>
+              <a:spcAft>
+                <a:spcPts val="600"/>
+              </a:spcAft>
+              <a:defRPr sz="2000">
+                <a:solidFill>
+                  <a:srgbClr val="ECFAFF"/>
+                </a:solidFill>
+              </a:defRPr>
+            </a:pPr>
+            <a:r>
+              <a:t>Sender: nc 127.0.0.1 4444 &lt; secret_message.txt</a:t>
+            </a:r>
+          </a:p>
+          <a:p>
+            <a:pPr>
+              <a:spcAft>
+                <a:spcPts val="600"/>
+              </a:spcAft>
+              <a:defRPr sz="2000">
+                <a:solidFill>
+                  <a:srgbClr val="ECFAFF"/>
+                </a:solidFill>
+              </a:defRPr>
+            </a:pPr>
+            <a:r>
+              <a:t>Wireshark filter: tcp.port == 4444</a:t>
+            </a:r>
+          </a:p>
+          <a:p>
+            <a:pPr>
+              <a:spcAft>
+                <a:spcPts val="600"/>
+              </a:spcAft>
+              <a:defRPr sz="2000">
+                <a:solidFill>
+                  <a:srgbClr val="ECFAFF"/>
+                </a:solidFill>
+              </a:defRPr>
+            </a:pPr>
+            <a:r>
+              <a:t>Right-click packet -&gt; Follow -&gt; TCP Stream</a:t>
+            </a:r>
+          </a:p>
+          <a:p>
+            <a:pPr>
+              <a:spcAft>
+                <a:spcPts val="600"/>
+              </a:spcAft>
+              <a:defRPr sz="2000">
+                <a:solidFill>
+                  <a:srgbClr val="ECFAFF"/>
+                </a:solidFill>
+              </a:defRPr>
+            </a:pPr>
+            <a:r>
+              <a:t>Expected result: secret message is visible.</a:t>
+            </a:r>
+          </a:p>
+        </p:txBody>
+      </p:sp>
     </p:spTree>
   </p:cSld>
   <p:clrMapOvr>
@@ -5203,93 +5889,173 @@
         <p:nvPr/>
       </p:nvGrpSpPr>
       <p:grpSpPr/>
-      <p:sp>
-        <p:nvSpPr>
-          <p:cNvPr id="2" name="Title 1"/>
-          <p:cNvSpPr>
-            <a:spLocks noGrp="1"/>
-          </p:cNvSpPr>
-          <p:nvPr>
-            <p:ph type="title"/>
-          </p:nvPr>
-        </p:nvSpPr>
-        <p:spPr/>
-        <p:txBody>
-          <a:bodyPr/>
-          <a:lstStyle/>
-          <a:p>
-            <a:pPr>
-              <a:defRPr b="1" sz="3000">
-                <a:solidFill>
-                  <a:srgbClr val="1F4E79"/>
-                </a:solidFill>
-              </a:defRPr>
-            </a:pPr>
-            <a:r>
-              <a:t>Applications / Relevance</a:t>
-            </a:r>
-          </a:p>
-        </p:txBody>
-      </p:sp>
-      <p:sp>
-        <p:nvSpPr>
-          <p:cNvPr id="3" name="TextBox 2"/>
-          <p:cNvSpPr txBox="1"/>
+      <p:pic>
+        <p:nvPicPr>
+          <p:cNvPr id="2" name="Picture 1" descr="network_security_background.png"/>
+          <p:cNvPicPr>
+            <a:picLocks noChangeAspect="1"/>
+          </p:cNvPicPr>
           <p:nvPr/>
-        </p:nvSpPr>
+        </p:nvPicPr>
+        <p:blipFill>
+          <a:blip r:embed="rId2"/>
+          <a:stretch>
+            <a:fillRect/>
+          </a:stretch>
+        </p:blipFill>
         <p:spPr>
           <a:xfrm>
-            <a:off x="731520" y="1417320"/>
-            <a:ext cx="7955279" cy="4389120"/>
+            <a:off x="0" y="0"/>
+            <a:ext cx="12191695" cy="6858000"/>
           </a:xfrm>
           <a:prstGeom prst="rect">
             <a:avLst/>
           </a:prstGeom>
-          <a:noFill/>
         </p:spPr>
-        <p:txBody>
-          <a:bodyPr wrap="square">
+      </p:pic>
+      <p:sp>
+        <p:nvSpPr>
+          <p:cNvPr id="3" name="TextBox 2"/>
+          <p:cNvSpPr txBox="1"/>
+          <p:nvPr/>
+        </p:nvSpPr>
+        <p:spPr>
+          <a:xfrm>
+            <a:off x="502920" y="301752"/>
+            <a:ext cx="11155680" cy="658368"/>
+          </a:xfrm>
+          <a:prstGeom prst="rect">
+            <a:avLst/>
+          </a:prstGeom>
+          <a:solidFill>
+            <a:srgbClr val="040F1E"/>
+          </a:solidFill>
+          <a:ln>
+            <a:solidFill>
+              <a:srgbClr val="4BCDFF"/>
+            </a:solidFill>
+          </a:ln>
+        </p:spPr>
+        <p:txBody>
+          <a:bodyPr wrap="none">
             <a:spAutoFit/>
           </a:bodyPr>
           <a:lstStyle/>
           <a:p>
             <a:pPr>
-              <a:defRPr sz="2200"/>
-            </a:pPr>
-            <a:r>
-              <a:t>HTTPS protects website communication.</a:t>
-            </a:r>
-          </a:p>
-          <a:p>
-            <a:pPr>
-              <a:defRPr sz="2200"/>
-            </a:pPr>
-            <a:r>
-              <a:t>SSH protects remote login.</a:t>
-            </a:r>
-          </a:p>
-          <a:p>
-            <a:pPr>
-              <a:defRPr sz="2200"/>
-            </a:pPr>
-            <a:r>
-              <a:t>VPNs protect traffic on unsafe networks.</a:t>
-            </a:r>
-          </a:p>
-          <a:p>
-            <a:pPr>
-              <a:defRPr sz="2200"/>
-            </a:pPr>
-            <a:r>
-              <a:t>Secure file transfer protects files in transit.</a:t>
-            </a:r>
-          </a:p>
-          <a:p>
-            <a:pPr>
-              <a:defRPr sz="2200"/>
-            </a:pPr>
-            <a:r>
-              <a:t>Encrypted messaging protects private chats.</a:t>
+              <a:defRPr b="1" sz="2500">
+                <a:solidFill>
+                  <a:srgbClr val="E8F8FF"/>
+                </a:solidFill>
+              </a:defRPr>
+            </a:pPr>
+            <a:r>
+              <a:t>Plaintext Observation</a:t>
+            </a:r>
+          </a:p>
+        </p:txBody>
+      </p:sp>
+      <p:sp>
+        <p:nvSpPr>
+          <p:cNvPr id="4" name="TextBox 3"/>
+          <p:cNvSpPr txBox="1"/>
+          <p:nvPr/>
+        </p:nvSpPr>
+        <p:spPr>
+          <a:xfrm>
+            <a:off x="685800" y="1234440"/>
+            <a:ext cx="10835640" cy="5074920"/>
+          </a:xfrm>
+          <a:prstGeom prst="rect">
+            <a:avLst/>
+          </a:prstGeom>
+          <a:solidFill>
+            <a:srgbClr val="051222"/>
+          </a:solidFill>
+          <a:ln>
+            <a:solidFill>
+              <a:srgbClr val="2282B4"/>
+            </a:solidFill>
+          </a:ln>
+        </p:spPr>
+        <p:txBody>
+          <a:bodyPr wrap="square" lIns="228600" rIns="201168" tIns="164592">
+            <a:spAutoFit/>
+          </a:bodyPr>
+          <a:lstStyle/>
+          <a:p>
+            <a:pPr>
+              <a:spcAft>
+                <a:spcPts val="600"/>
+              </a:spcAft>
+              <a:defRPr sz="2000">
+                <a:solidFill>
+                  <a:srgbClr val="ECFAFF"/>
+                </a:solidFill>
+              </a:defRPr>
+            </a:pPr>
+            <a:r>
+              <a:t>Receiver gets the file successfully.</a:t>
+            </a:r>
+          </a:p>
+          <a:p>
+            <a:pPr>
+              <a:spcAft>
+                <a:spcPts val="600"/>
+              </a:spcAft>
+              <a:defRPr sz="2000">
+                <a:solidFill>
+                  <a:srgbClr val="ECFAFF"/>
+                </a:solidFill>
+              </a:defRPr>
+            </a:pPr>
+            <a:r>
+              <a:t>Wireshark also displays the secret text.</a:t>
+            </a:r>
+          </a:p>
+          <a:p>
+            <a:pPr>
+              <a:spcAft>
+                <a:spcPts val="600"/>
+              </a:spcAft>
+              <a:defRPr sz="2000">
+                <a:solidFill>
+                  <a:srgbClr val="ECFAFF"/>
+                </a:solidFill>
+              </a:defRPr>
+            </a:pPr>
+            <a:r>
+              <a:t>This means an observer can read the data.</a:t>
+            </a:r>
+          </a:p>
+          <a:p>
+            <a:pPr>
+              <a:spcAft>
+                <a:spcPts val="600"/>
+              </a:spcAft>
+              <a:defRPr sz="2000">
+                <a:solidFill>
+                  <a:srgbClr val="ECFAFF"/>
+                </a:solidFill>
+              </a:defRPr>
+            </a:pPr>
+            <a:r>
+              <a:t>No password or key is needed by the attacker.</a:t>
+            </a:r>
+          </a:p>
+          <a:p>
+            <a:pPr>
+              <a:spcAft>
+                <a:spcPts val="600"/>
+              </a:spcAft>
+              <a:defRPr sz="2000">
+                <a:solidFill>
+                  <a:srgbClr val="ECFAFF"/>
+                </a:solidFill>
+              </a:defRPr>
+            </a:pPr>
+            <a:r>
+              <a:t>Conclusion: normal Netcat does not provide confidentiality.</a:t>
             </a:r>
           </a:p>
         </p:txBody>
@@ -5312,85 +6078,173 @@
         <p:nvPr/>
       </p:nvGrpSpPr>
       <p:grpSpPr/>
-      <p:sp>
-        <p:nvSpPr>
-          <p:cNvPr id="2" name="Title 1"/>
-          <p:cNvSpPr>
-            <a:spLocks noGrp="1"/>
-          </p:cNvSpPr>
-          <p:nvPr>
-            <p:ph type="title"/>
-          </p:nvPr>
-        </p:nvSpPr>
-        <p:spPr/>
-        <p:txBody>
-          <a:bodyPr/>
-          <a:lstStyle/>
-          <a:p>
-            <a:pPr>
-              <a:defRPr b="1" sz="3000">
-                <a:solidFill>
-                  <a:srgbClr val="1F4E79"/>
-                </a:solidFill>
-              </a:defRPr>
-            </a:pPr>
-            <a:r>
-              <a:t>Limitations</a:t>
-            </a:r>
-          </a:p>
-        </p:txBody>
-      </p:sp>
-      <p:sp>
-        <p:nvSpPr>
-          <p:cNvPr id="3" name="TextBox 2"/>
-          <p:cNvSpPr txBox="1"/>
+      <p:pic>
+        <p:nvPicPr>
+          <p:cNvPr id="2" name="Picture 1" descr="network_security_background.png"/>
+          <p:cNvPicPr>
+            <a:picLocks noChangeAspect="1"/>
+          </p:cNvPicPr>
           <p:nvPr/>
-        </p:nvSpPr>
+        </p:nvPicPr>
+        <p:blipFill>
+          <a:blip r:embed="rId2"/>
+          <a:stretch>
+            <a:fillRect/>
+          </a:stretch>
+        </p:blipFill>
         <p:spPr>
           <a:xfrm>
-            <a:off x="731520" y="1417320"/>
-            <a:ext cx="7955279" cy="4389120"/>
+            <a:off x="0" y="0"/>
+            <a:ext cx="12191695" cy="6858000"/>
           </a:xfrm>
           <a:prstGeom prst="rect">
             <a:avLst/>
           </a:prstGeom>
-          <a:noFill/>
         </p:spPr>
-        <p:txBody>
-          <a:bodyPr wrap="square">
+      </p:pic>
+      <p:sp>
+        <p:nvSpPr>
+          <p:cNvPr id="3" name="TextBox 2"/>
+          <p:cNvSpPr txBox="1"/>
+          <p:nvPr/>
+        </p:nvSpPr>
+        <p:spPr>
+          <a:xfrm>
+            <a:off x="502920" y="301752"/>
+            <a:ext cx="11155680" cy="658368"/>
+          </a:xfrm>
+          <a:prstGeom prst="rect">
+            <a:avLst/>
+          </a:prstGeom>
+          <a:solidFill>
+            <a:srgbClr val="040F1E"/>
+          </a:solidFill>
+          <a:ln>
+            <a:solidFill>
+              <a:srgbClr val="4BCDFF"/>
+            </a:solidFill>
+          </a:ln>
+        </p:spPr>
+        <p:txBody>
+          <a:bodyPr wrap="none">
             <a:spAutoFit/>
           </a:bodyPr>
           <a:lstStyle/>
           <a:p>
             <a:pPr>
-              <a:defRPr sz="2200"/>
-            </a:pPr>
-            <a:r>
-              <a:t>Traditional Netcat does not encrypt by default.</a:t>
-            </a:r>
-          </a:p>
-          <a:p>
-            <a:pPr>
-              <a:defRPr sz="2200"/>
-            </a:pPr>
-            <a:r>
-              <a:t>Ncat SSL is mainly used here for learning/demo.</a:t>
-            </a:r>
-          </a:p>
-          <a:p>
-            <a:pPr>
-              <a:defRPr sz="2200"/>
-            </a:pPr>
-            <a:r>
-              <a:t>Self-signed certificates are okay for lab demo only.</a:t>
-            </a:r>
-          </a:p>
-          <a:p>
-            <a:pPr>
-              <a:defRPr sz="2200"/>
-            </a:pPr>
-            <a:r>
-              <a:t>Production systems should use SSH, SCP, HTTPS, or VPN.</a:t>
+              <a:defRPr b="1" sz="2500">
+                <a:solidFill>
+                  <a:srgbClr val="E8F8FF"/>
+                </a:solidFill>
+              </a:defRPr>
+            </a:pPr>
+            <a:r>
+              <a:t>Cryptanalysis Demonstration</a:t>
+            </a:r>
+          </a:p>
+        </p:txBody>
+      </p:sp>
+      <p:sp>
+        <p:nvSpPr>
+          <p:cNvPr id="4" name="TextBox 3"/>
+          <p:cNvSpPr txBox="1"/>
+          <p:nvPr/>
+        </p:nvSpPr>
+        <p:spPr>
+          <a:xfrm>
+            <a:off x="685800" y="1234440"/>
+            <a:ext cx="10835640" cy="5074920"/>
+          </a:xfrm>
+          <a:prstGeom prst="rect">
+            <a:avLst/>
+          </a:prstGeom>
+          <a:solidFill>
+            <a:srgbClr val="051222"/>
+          </a:solidFill>
+          <a:ln>
+            <a:solidFill>
+              <a:srgbClr val="2282B4"/>
+            </a:solidFill>
+          </a:ln>
+        </p:spPr>
+        <p:txBody>
+          <a:bodyPr wrap="square" lIns="228600" rIns="201168" tIns="164592">
+            <a:spAutoFit/>
+          </a:bodyPr>
+          <a:lstStyle/>
+          <a:p>
+            <a:pPr>
+              <a:spcAft>
+                <a:spcPts val="600"/>
+              </a:spcAft>
+              <a:defRPr sz="2000">
+                <a:solidFill>
+                  <a:srgbClr val="ECFAFF"/>
+                </a:solidFill>
+              </a:defRPr>
+            </a:pPr>
+            <a:r>
+              <a:t>We use packet sniffing as the attack method.</a:t>
+            </a:r>
+          </a:p>
+          <a:p>
+            <a:pPr>
+              <a:spcAft>
+                <a:spcPts val="600"/>
+              </a:spcAft>
+              <a:defRPr sz="2000">
+                <a:solidFill>
+                  <a:srgbClr val="ECFAFF"/>
+                </a:solidFill>
+              </a:defRPr>
+            </a:pPr>
+            <a:r>
+              <a:t>The attacker captures traffic using Wireshark.</a:t>
+            </a:r>
+          </a:p>
+          <a:p>
+            <a:pPr>
+              <a:spcAft>
+                <a:spcPts val="600"/>
+              </a:spcAft>
+              <a:defRPr sz="2000">
+                <a:solidFill>
+                  <a:srgbClr val="ECFAFF"/>
+                </a:solidFill>
+              </a:defRPr>
+            </a:pPr>
+            <a:r>
+              <a:t>In plaintext mode, there is no encryption to break.</a:t>
+            </a:r>
+          </a:p>
+          <a:p>
+            <a:pPr>
+              <a:spcAft>
+                <a:spcPts val="600"/>
+              </a:spcAft>
+              <a:defRPr sz="2000">
+                <a:solidFill>
+                  <a:srgbClr val="ECFAFF"/>
+                </a:solidFill>
+              </a:defRPr>
+            </a:pPr>
+            <a:r>
+              <a:t>Follow TCP Stream directly reveals the message.</a:t>
+            </a:r>
+          </a:p>
+          <a:p>
+            <a:pPr>
+              <a:spcAft>
+                <a:spcPts val="600"/>
+              </a:spcAft>
+              <a:defRPr sz="2000">
+                <a:solidFill>
+                  <a:srgbClr val="ECFAFF"/>
+                </a:solidFill>
+              </a:defRPr>
+            </a:pPr>
+            <a:r>
+              <a:t>This is simple but powerful proof of insecurity.</a:t>
             </a:r>
           </a:p>
         </p:txBody>
@@ -5413,93 +6267,173 @@
         <p:nvPr/>
       </p:nvGrpSpPr>
       <p:grpSpPr/>
-      <p:sp>
-        <p:nvSpPr>
-          <p:cNvPr id="2" name="Title 1"/>
-          <p:cNvSpPr>
-            <a:spLocks noGrp="1"/>
-          </p:cNvSpPr>
-          <p:nvPr>
-            <p:ph type="title"/>
-          </p:nvPr>
-        </p:nvSpPr>
-        <p:spPr/>
-        <p:txBody>
-          <a:bodyPr/>
-          <a:lstStyle/>
-          <a:p>
-            <a:pPr>
-              <a:defRPr b="1" sz="3000">
-                <a:solidFill>
-                  <a:srgbClr val="1F4E79"/>
-                </a:solidFill>
-              </a:defRPr>
-            </a:pPr>
-            <a:r>
-              <a:t>Conclusion</a:t>
-            </a:r>
-          </a:p>
-        </p:txBody>
-      </p:sp>
-      <p:sp>
-        <p:nvSpPr>
-          <p:cNvPr id="3" name="TextBox 2"/>
-          <p:cNvSpPr txBox="1"/>
+      <p:pic>
+        <p:nvPicPr>
+          <p:cNvPr id="2" name="Picture 1" descr="network_security_background.png"/>
+          <p:cNvPicPr>
+            <a:picLocks noChangeAspect="1"/>
+          </p:cNvPicPr>
           <p:nvPr/>
-        </p:nvSpPr>
+        </p:nvPicPr>
+        <p:blipFill>
+          <a:blip r:embed="rId2"/>
+          <a:stretch>
+            <a:fillRect/>
+          </a:stretch>
+        </p:blipFill>
         <p:spPr>
           <a:xfrm>
-            <a:off x="731520" y="1417320"/>
-            <a:ext cx="7955279" cy="4389120"/>
+            <a:off x="0" y="0"/>
+            <a:ext cx="12191695" cy="6858000"/>
           </a:xfrm>
           <a:prstGeom prst="rect">
             <a:avLst/>
           </a:prstGeom>
-          <a:noFill/>
         </p:spPr>
-        <p:txBody>
-          <a:bodyPr wrap="square">
+      </p:pic>
+      <p:sp>
+        <p:nvSpPr>
+          <p:cNvPr id="3" name="TextBox 2"/>
+          <p:cNvSpPr txBox="1"/>
+          <p:nvPr/>
+        </p:nvSpPr>
+        <p:spPr>
+          <a:xfrm>
+            <a:off x="502920" y="301752"/>
+            <a:ext cx="11155680" cy="658368"/>
+          </a:xfrm>
+          <a:prstGeom prst="rect">
+            <a:avLst/>
+          </a:prstGeom>
+          <a:solidFill>
+            <a:srgbClr val="040F1E"/>
+          </a:solidFill>
+          <a:ln>
+            <a:solidFill>
+              <a:srgbClr val="4BCDFF"/>
+            </a:solidFill>
+          </a:ln>
+        </p:spPr>
+        <p:txBody>
+          <a:bodyPr wrap="none">
             <a:spAutoFit/>
           </a:bodyPr>
           <a:lstStyle/>
           <a:p>
             <a:pPr>
-              <a:defRPr sz="2200"/>
-            </a:pPr>
-            <a:r>
-              <a:t>Normal Netcat sends plaintext data.</a:t>
-            </a:r>
-          </a:p>
-          <a:p>
-            <a:pPr>
-              <a:defRPr sz="2200"/>
-            </a:pPr>
-            <a:r>
-              <a:t>Plaintext data is readable in Wireshark.</a:t>
-            </a:r>
-          </a:p>
-          <a:p>
-            <a:pPr>
-              <a:defRPr sz="2200"/>
-            </a:pPr>
-            <a:r>
-              <a:t>Ncat SSL encrypts the data channel.</a:t>
-            </a:r>
-          </a:p>
-          <a:p>
-            <a:pPr>
-              <a:defRPr sz="2200"/>
-            </a:pPr>
-            <a:r>
-              <a:t>Encrypted traffic protects confidentiality.</a:t>
-            </a:r>
-          </a:p>
-          <a:p>
-            <a:pPr>
-              <a:defRPr sz="2200"/>
-            </a:pPr>
-            <a:r>
-              <a:t>Therefore, encryption is necessary for secure transmission.</a:t>
+              <a:defRPr b="1" sz="2500">
+                <a:solidFill>
+                  <a:srgbClr val="E8F8FF"/>
+                </a:solidFill>
+              </a:defRPr>
+            </a:pPr>
+            <a:r>
+              <a:t>Generate SSL Certificate</a:t>
+            </a:r>
+          </a:p>
+        </p:txBody>
+      </p:sp>
+      <p:sp>
+        <p:nvSpPr>
+          <p:cNvPr id="4" name="TextBox 3"/>
+          <p:cNvSpPr txBox="1"/>
+          <p:nvPr/>
+        </p:nvSpPr>
+        <p:spPr>
+          <a:xfrm>
+            <a:off x="685800" y="1234440"/>
+            <a:ext cx="10835640" cy="5074920"/>
+          </a:xfrm>
+          <a:prstGeom prst="rect">
+            <a:avLst/>
+          </a:prstGeom>
+          <a:solidFill>
+            <a:srgbClr val="051222"/>
+          </a:solidFill>
+          <a:ln>
+            <a:solidFill>
+              <a:srgbClr val="2282B4"/>
+            </a:solidFill>
+          </a:ln>
+        </p:spPr>
+        <p:txBody>
+          <a:bodyPr wrap="square" lIns="228600" rIns="201168" tIns="164592">
+            <a:spAutoFit/>
+          </a:bodyPr>
+          <a:lstStyle/>
+          <a:p>
+            <a:pPr>
+              <a:spcAft>
+                <a:spcPts val="600"/>
+              </a:spcAft>
+              <a:defRPr sz="2000">
+                <a:solidFill>
+                  <a:srgbClr val="ECFAFF"/>
+                </a:solidFill>
+              </a:defRPr>
+            </a:pPr>
+            <a:r>
+              <a:t>OpenSSL creates a temporary certificate and private key.</a:t>
+            </a:r>
+          </a:p>
+          <a:p>
+            <a:pPr>
+              <a:spcAft>
+                <a:spcPts val="600"/>
+              </a:spcAft>
+              <a:defRPr sz="2000">
+                <a:solidFill>
+                  <a:srgbClr val="ECFAFF"/>
+                </a:solidFill>
+              </a:defRPr>
+            </a:pPr>
+            <a:r>
+              <a:t>server.crt is the certificate.</a:t>
+            </a:r>
+          </a:p>
+          <a:p>
+            <a:pPr>
+              <a:spcAft>
+                <a:spcPts val="600"/>
+              </a:spcAft>
+              <a:defRPr sz="2000">
+                <a:solidFill>
+                  <a:srgbClr val="ECFAFF"/>
+                </a:solidFill>
+              </a:defRPr>
+            </a:pPr>
+            <a:r>
+              <a:t>server.key is the private key.</a:t>
+            </a:r>
+          </a:p>
+          <a:p>
+            <a:pPr>
+              <a:spcAft>
+                <a:spcPts val="600"/>
+              </a:spcAft>
+              <a:defRPr sz="2000">
+                <a:solidFill>
+                  <a:srgbClr val="ECFAFF"/>
+                </a:solidFill>
+              </a:defRPr>
+            </a:pPr>
+            <a:r>
+              <a:t>For a classroom demo, a self-signed certificate is acceptable.</a:t>
+            </a:r>
+          </a:p>
+          <a:p>
+            <a:pPr>
+              <a:spcAft>
+                <a:spcPts val="600"/>
+              </a:spcAft>
+              <a:defRPr sz="2000">
+                <a:solidFill>
+                  <a:srgbClr val="ECFAFF"/>
+                </a:solidFill>
+              </a:defRPr>
+            </a:pPr>
+            <a:r>
+              <a:t>The certificate enables the encrypted Ncat SSL listener.</a:t>
             </a:r>
           </a:p>
         </p:txBody>
@@ -5522,85 +6456,740 @@
         <p:nvPr/>
       </p:nvGrpSpPr>
       <p:grpSpPr/>
-      <p:sp>
-        <p:nvSpPr>
-          <p:cNvPr id="2" name="Title 1"/>
-          <p:cNvSpPr>
-            <a:spLocks noGrp="1"/>
-          </p:cNvSpPr>
-          <p:nvPr>
-            <p:ph type="title"/>
-          </p:nvPr>
-        </p:nvSpPr>
-        <p:spPr/>
-        <p:txBody>
-          <a:bodyPr/>
-          <a:lstStyle/>
-          <a:p>
-            <a:pPr>
-              <a:defRPr b="1" sz="3000">
-                <a:solidFill>
-                  <a:srgbClr val="1F4E79"/>
-                </a:solidFill>
-              </a:defRPr>
-            </a:pPr>
-            <a:r>
-              <a:t>Team Speaking Split</a:t>
-            </a:r>
-          </a:p>
-        </p:txBody>
-      </p:sp>
-      <p:sp>
-        <p:nvSpPr>
-          <p:cNvPr id="3" name="TextBox 2"/>
-          <p:cNvSpPr txBox="1"/>
+      <p:pic>
+        <p:nvPicPr>
+          <p:cNvPr id="2" name="Picture 1" descr="network_security_background.png"/>
+          <p:cNvPicPr>
+            <a:picLocks noChangeAspect="1"/>
+          </p:cNvPicPr>
           <p:nvPr/>
-        </p:nvSpPr>
+        </p:nvPicPr>
+        <p:blipFill>
+          <a:blip r:embed="rId2"/>
+          <a:stretch>
+            <a:fillRect/>
+          </a:stretch>
+        </p:blipFill>
         <p:spPr>
           <a:xfrm>
-            <a:off x="731520" y="1417320"/>
-            <a:ext cx="7955279" cy="4389120"/>
+            <a:off x="0" y="0"/>
+            <a:ext cx="12191695" cy="6858000"/>
           </a:xfrm>
           <a:prstGeom prst="rect">
             <a:avLst/>
           </a:prstGeom>
-          <a:noFill/>
         </p:spPr>
-        <p:txBody>
-          <a:bodyPr wrap="square">
+      </p:pic>
+      <p:sp>
+        <p:nvSpPr>
+          <p:cNvPr id="3" name="TextBox 2"/>
+          <p:cNvSpPr txBox="1"/>
+          <p:nvPr/>
+        </p:nvSpPr>
+        <p:spPr>
+          <a:xfrm>
+            <a:off x="502920" y="301752"/>
+            <a:ext cx="11155680" cy="658368"/>
+          </a:xfrm>
+          <a:prstGeom prst="rect">
+            <a:avLst/>
+          </a:prstGeom>
+          <a:solidFill>
+            <a:srgbClr val="040F1E"/>
+          </a:solidFill>
+          <a:ln>
+            <a:solidFill>
+              <a:srgbClr val="4BCDFF"/>
+            </a:solidFill>
+          </a:ln>
+        </p:spPr>
+        <p:txBody>
+          <a:bodyPr wrap="none">
             <a:spAutoFit/>
           </a:bodyPr>
           <a:lstStyle/>
           <a:p>
             <a:pPr>
-              <a:defRPr sz="2200"/>
-            </a:pPr>
-            <a:r>
-              <a:t>Tanishk: Netcat introduction and plaintext demo.</a:t>
-            </a:r>
-          </a:p>
-          <a:p>
-            <a:pPr>
-              <a:defRPr sz="2200"/>
-            </a:pPr>
-            <a:r>
-              <a:t>Aastha: Confidentiality and encrypted Ncat SSL demo.</a:t>
-            </a:r>
-          </a:p>
-          <a:p>
-            <a:pPr>
-              <a:defRPr sz="2200"/>
-            </a:pPr>
-            <a:r>
-              <a:t>Aditi: Wireshark observation, comparison, conclusion.</a:t>
-            </a:r>
-          </a:p>
-          <a:p>
-            <a:pPr>
-              <a:defRPr sz="2200"/>
-            </a:pPr>
-            <a:r>
-              <a:t>Everyone: Be ready for basic viva questions.</a:t>
+              <a:defRPr b="1" sz="2500">
+                <a:solidFill>
+                  <a:srgbClr val="E8F8FF"/>
+                </a:solidFill>
+              </a:defRPr>
+            </a:pPr>
+            <a:r>
+              <a:t>Encrypted Experiment Commands</a:t>
+            </a:r>
+          </a:p>
+        </p:txBody>
+      </p:sp>
+      <p:sp>
+        <p:nvSpPr>
+          <p:cNvPr id="4" name="TextBox 3"/>
+          <p:cNvSpPr txBox="1"/>
+          <p:nvPr/>
+        </p:nvSpPr>
+        <p:spPr>
+          <a:xfrm>
+            <a:off x="685800" y="1234440"/>
+            <a:ext cx="10835640" cy="5074920"/>
+          </a:xfrm>
+          <a:prstGeom prst="rect">
+            <a:avLst/>
+          </a:prstGeom>
+          <a:solidFill>
+            <a:srgbClr val="051222"/>
+          </a:solidFill>
+          <a:ln>
+            <a:solidFill>
+              <a:srgbClr val="2282B4"/>
+            </a:solidFill>
+          </a:ln>
+        </p:spPr>
+        <p:txBody>
+          <a:bodyPr wrap="square" lIns="228600" rIns="201168" tIns="164592">
+            <a:spAutoFit/>
+          </a:bodyPr>
+          <a:lstStyle/>
+          <a:p>
+            <a:pPr>
+              <a:spcAft>
+                <a:spcPts val="600"/>
+              </a:spcAft>
+              <a:defRPr sz="2000">
+                <a:solidFill>
+                  <a:srgbClr val="ECFAFF"/>
+                </a:solidFill>
+              </a:defRPr>
+            </a:pPr>
+            <a:r>
+              <a:t>Receiver: ncat --ssl --ssl-cert server.crt --ssl-key server.key -lvnp 4445 &gt; received_secure.txt</a:t>
+            </a:r>
+          </a:p>
+          <a:p>
+            <a:pPr>
+              <a:spcAft>
+                <a:spcPts val="600"/>
+              </a:spcAft>
+              <a:defRPr sz="2000">
+                <a:solidFill>
+                  <a:srgbClr val="ECFAFF"/>
+                </a:solidFill>
+              </a:defRPr>
+            </a:pPr>
+            <a:r>
+              <a:t>Sender: ncat --ssl 127.0.0.1 4445 &lt; secret_message.txt</a:t>
+            </a:r>
+          </a:p>
+          <a:p>
+            <a:pPr>
+              <a:spcAft>
+                <a:spcPts val="600"/>
+              </a:spcAft>
+              <a:defRPr sz="2000">
+                <a:solidFill>
+                  <a:srgbClr val="ECFAFF"/>
+                </a:solidFill>
+              </a:defRPr>
+            </a:pPr>
+            <a:r>
+              <a:t>Wireshark filter: tcp.port == 4445</a:t>
+            </a:r>
+          </a:p>
+          <a:p>
+            <a:pPr>
+              <a:spcAft>
+                <a:spcPts val="600"/>
+              </a:spcAft>
+              <a:defRPr sz="2000">
+                <a:solidFill>
+                  <a:srgbClr val="ECFAFF"/>
+                </a:solidFill>
+              </a:defRPr>
+            </a:pPr>
+            <a:r>
+              <a:t>Right-click packet -&gt; Follow -&gt; TCP Stream</a:t>
+            </a:r>
+          </a:p>
+          <a:p>
+            <a:pPr>
+              <a:spcAft>
+                <a:spcPts val="600"/>
+              </a:spcAft>
+              <a:defRPr sz="2000">
+                <a:solidFill>
+                  <a:srgbClr val="ECFAFF"/>
+                </a:solidFill>
+              </a:defRPr>
+            </a:pPr>
+            <a:r>
+              <a:t>Expected result: readable message is not visible.</a:t>
+            </a:r>
+          </a:p>
+        </p:txBody>
+      </p:sp>
+    </p:spTree>
+  </p:cSld>
+  <p:clrMapOvr>
+    <a:masterClrMapping/>
+  </p:clrMapOvr>
+</p:sld>
+</file>
+
+<file path=ppt/slides/slide17.xml><?xml version="1.0" encoding="utf-8"?>
+<p:sld xmlns:a="http://schemas.openxmlformats.org/drawingml/2006/main" xmlns:p="http://schemas.openxmlformats.org/presentationml/2006/main" xmlns:r="http://schemas.openxmlformats.org/officeDocument/2006/relationships">
+  <p:cSld>
+    <p:spTree>
+      <p:nvGrpSpPr>
+        <p:cNvPr id="1" name=""/>
+        <p:cNvGrpSpPr/>
+        <p:nvPr/>
+      </p:nvGrpSpPr>
+      <p:grpSpPr/>
+      <p:pic>
+        <p:nvPicPr>
+          <p:cNvPr id="2" name="Picture 1" descr="network_security_background.png"/>
+          <p:cNvPicPr>
+            <a:picLocks noChangeAspect="1"/>
+          </p:cNvPicPr>
+          <p:nvPr/>
+        </p:nvPicPr>
+        <p:blipFill>
+          <a:blip r:embed="rId2"/>
+          <a:stretch>
+            <a:fillRect/>
+          </a:stretch>
+        </p:blipFill>
+        <p:spPr>
+          <a:xfrm>
+            <a:off x="0" y="0"/>
+            <a:ext cx="12191695" cy="6858000"/>
+          </a:xfrm>
+          <a:prstGeom prst="rect">
+            <a:avLst/>
+          </a:prstGeom>
+        </p:spPr>
+      </p:pic>
+      <p:sp>
+        <p:nvSpPr>
+          <p:cNvPr id="3" name="TextBox 2"/>
+          <p:cNvSpPr txBox="1"/>
+          <p:nvPr/>
+        </p:nvSpPr>
+        <p:spPr>
+          <a:xfrm>
+            <a:off x="502920" y="301752"/>
+            <a:ext cx="11155680" cy="658368"/>
+          </a:xfrm>
+          <a:prstGeom prst="rect">
+            <a:avLst/>
+          </a:prstGeom>
+          <a:solidFill>
+            <a:srgbClr val="040F1E"/>
+          </a:solidFill>
+          <a:ln>
+            <a:solidFill>
+              <a:srgbClr val="4BCDFF"/>
+            </a:solidFill>
+          </a:ln>
+        </p:spPr>
+        <p:txBody>
+          <a:bodyPr wrap="none">
+            <a:spAutoFit/>
+          </a:bodyPr>
+          <a:lstStyle/>
+          <a:p>
+            <a:pPr>
+              <a:defRPr b="1" sz="2500">
+                <a:solidFill>
+                  <a:srgbClr val="E8F8FF"/>
+                </a:solidFill>
+              </a:defRPr>
+            </a:pPr>
+            <a:r>
+              <a:t>Encrypted Observation</a:t>
+            </a:r>
+          </a:p>
+        </p:txBody>
+      </p:sp>
+      <p:sp>
+        <p:nvSpPr>
+          <p:cNvPr id="4" name="TextBox 3"/>
+          <p:cNvSpPr txBox="1"/>
+          <p:nvPr/>
+        </p:nvSpPr>
+        <p:spPr>
+          <a:xfrm>
+            <a:off x="685800" y="1234440"/>
+            <a:ext cx="10835640" cy="5074920"/>
+          </a:xfrm>
+          <a:prstGeom prst="rect">
+            <a:avLst/>
+          </a:prstGeom>
+          <a:solidFill>
+            <a:srgbClr val="051222"/>
+          </a:solidFill>
+          <a:ln>
+            <a:solidFill>
+              <a:srgbClr val="2282B4"/>
+            </a:solidFill>
+          </a:ln>
+        </p:spPr>
+        <p:txBody>
+          <a:bodyPr wrap="square" lIns="228600" rIns="201168" tIns="164592">
+            <a:spAutoFit/>
+          </a:bodyPr>
+          <a:lstStyle/>
+          <a:p>
+            <a:pPr>
+              <a:spcAft>
+                <a:spcPts val="600"/>
+              </a:spcAft>
+              <a:defRPr sz="2000">
+                <a:solidFill>
+                  <a:srgbClr val="ECFAFF"/>
+                </a:solidFill>
+              </a:defRPr>
+            </a:pPr>
+            <a:r>
+              <a:t>Receiver still gets the correct file.</a:t>
+            </a:r>
+          </a:p>
+          <a:p>
+            <a:pPr>
+              <a:spcAft>
+                <a:spcPts val="600"/>
+              </a:spcAft>
+              <a:defRPr sz="2000">
+                <a:solidFill>
+                  <a:srgbClr val="ECFAFF"/>
+                </a:solidFill>
+              </a:defRPr>
+            </a:pPr>
+            <a:r>
+              <a:t>Wireshark captures packets but cannot show the readable message.</a:t>
+            </a:r>
+          </a:p>
+          <a:p>
+            <a:pPr>
+              <a:spcAft>
+                <a:spcPts val="600"/>
+              </a:spcAft>
+              <a:defRPr sz="2000">
+                <a:solidFill>
+                  <a:srgbClr val="ECFAFF"/>
+                </a:solidFill>
+              </a:defRPr>
+            </a:pPr>
+            <a:r>
+              <a:t>The data appears as encrypted SSL/TLS traffic.</a:t>
+            </a:r>
+          </a:p>
+          <a:p>
+            <a:pPr>
+              <a:spcAft>
+                <a:spcPts val="600"/>
+              </a:spcAft>
+              <a:defRPr sz="2000">
+                <a:solidFill>
+                  <a:srgbClr val="ECFAFF"/>
+                </a:solidFill>
+              </a:defRPr>
+            </a:pPr>
+            <a:r>
+              <a:t>An observer cannot understand the secret data.</a:t>
+            </a:r>
+          </a:p>
+          <a:p>
+            <a:pPr>
+              <a:spcAft>
+                <a:spcPts val="600"/>
+              </a:spcAft>
+              <a:defRPr sz="2000">
+                <a:solidFill>
+                  <a:srgbClr val="ECFAFF"/>
+                </a:solidFill>
+              </a:defRPr>
+            </a:pPr>
+            <a:r>
+              <a:t>Conclusion: encryption provides confidentiality.</a:t>
+            </a:r>
+          </a:p>
+        </p:txBody>
+      </p:sp>
+    </p:spTree>
+  </p:cSld>
+  <p:clrMapOvr>
+    <a:masterClrMapping/>
+  </p:clrMapOvr>
+</p:sld>
+</file>
+
+<file path=ppt/slides/slide18.xml><?xml version="1.0" encoding="utf-8"?>
+<p:sld xmlns:a="http://schemas.openxmlformats.org/drawingml/2006/main" xmlns:p="http://schemas.openxmlformats.org/presentationml/2006/main" xmlns:r="http://schemas.openxmlformats.org/officeDocument/2006/relationships">
+  <p:cSld>
+    <p:spTree>
+      <p:nvGrpSpPr>
+        <p:cNvPr id="1" name=""/>
+        <p:cNvGrpSpPr/>
+        <p:nvPr/>
+      </p:nvGrpSpPr>
+      <p:grpSpPr/>
+      <p:pic>
+        <p:nvPicPr>
+          <p:cNvPr id="2" name="Picture 1" descr="network_security_background.png"/>
+          <p:cNvPicPr>
+            <a:picLocks noChangeAspect="1"/>
+          </p:cNvPicPr>
+          <p:nvPr/>
+        </p:nvPicPr>
+        <p:blipFill>
+          <a:blip r:embed="rId2"/>
+          <a:stretch>
+            <a:fillRect/>
+          </a:stretch>
+        </p:blipFill>
+        <p:spPr>
+          <a:xfrm>
+            <a:off x="0" y="0"/>
+            <a:ext cx="12191695" cy="6858000"/>
+          </a:xfrm>
+          <a:prstGeom prst="rect">
+            <a:avLst/>
+          </a:prstGeom>
+        </p:spPr>
+      </p:pic>
+      <p:sp>
+        <p:nvSpPr>
+          <p:cNvPr id="3" name="TextBox 2"/>
+          <p:cNvSpPr txBox="1"/>
+          <p:nvPr/>
+        </p:nvSpPr>
+        <p:spPr>
+          <a:xfrm>
+            <a:off x="502920" y="301752"/>
+            <a:ext cx="11155680" cy="658368"/>
+          </a:xfrm>
+          <a:prstGeom prst="rect">
+            <a:avLst/>
+          </a:prstGeom>
+          <a:solidFill>
+            <a:srgbClr val="040F1E"/>
+          </a:solidFill>
+          <a:ln>
+            <a:solidFill>
+              <a:srgbClr val="4BCDFF"/>
+            </a:solidFill>
+          </a:ln>
+        </p:spPr>
+        <p:txBody>
+          <a:bodyPr wrap="none">
+            <a:spAutoFit/>
+          </a:bodyPr>
+          <a:lstStyle/>
+          <a:p>
+            <a:pPr>
+              <a:defRPr b="1" sz="2500">
+                <a:solidFill>
+                  <a:srgbClr val="E8F8FF"/>
+                </a:solidFill>
+              </a:defRPr>
+            </a:pPr>
+            <a:r>
+              <a:t>Plaintext vs Encrypted Result</a:t>
+            </a:r>
+          </a:p>
+        </p:txBody>
+      </p:sp>
+      <p:sp>
+        <p:nvSpPr>
+          <p:cNvPr id="4" name="TextBox 3"/>
+          <p:cNvSpPr txBox="1"/>
+          <p:nvPr/>
+        </p:nvSpPr>
+        <p:spPr>
+          <a:xfrm>
+            <a:off x="685800" y="1234440"/>
+            <a:ext cx="10835640" cy="5074920"/>
+          </a:xfrm>
+          <a:prstGeom prst="rect">
+            <a:avLst/>
+          </a:prstGeom>
+          <a:solidFill>
+            <a:srgbClr val="051222"/>
+          </a:solidFill>
+          <a:ln>
+            <a:solidFill>
+              <a:srgbClr val="2282B4"/>
+            </a:solidFill>
+          </a:ln>
+        </p:spPr>
+        <p:txBody>
+          <a:bodyPr wrap="square" lIns="228600" rIns="201168" tIns="164592">
+            <a:spAutoFit/>
+          </a:bodyPr>
+          <a:lstStyle/>
+          <a:p>
+            <a:pPr>
+              <a:spcAft>
+                <a:spcPts val="600"/>
+              </a:spcAft>
+              <a:defRPr sz="2000">
+                <a:solidFill>
+                  <a:srgbClr val="ECFAFF"/>
+                </a:solidFill>
+              </a:defRPr>
+            </a:pPr>
+            <a:r>
+              <a:t>Plaintext Netcat: easy to send, but unsafe for secrets.</a:t>
+            </a:r>
+          </a:p>
+          <a:p>
+            <a:pPr>
+              <a:spcAft>
+                <a:spcPts val="600"/>
+              </a:spcAft>
+              <a:defRPr sz="2000">
+                <a:solidFill>
+                  <a:srgbClr val="ECFAFF"/>
+                </a:solidFill>
+              </a:defRPr>
+            </a:pPr>
+            <a:r>
+              <a:t>Encrypted Ncat SSL: same message delivered, but hidden from Wireshark.</a:t>
+            </a:r>
+          </a:p>
+          <a:p>
+            <a:pPr>
+              <a:spcAft>
+                <a:spcPts val="600"/>
+              </a:spcAft>
+              <a:defRPr sz="2000">
+                <a:solidFill>
+                  <a:srgbClr val="ECFAFF"/>
+                </a:solidFill>
+              </a:defRPr>
+            </a:pPr>
+            <a:r>
+              <a:t>Both experiments prove the difference visually.</a:t>
+            </a:r>
+          </a:p>
+          <a:p>
+            <a:pPr>
+              <a:spcAft>
+                <a:spcPts val="600"/>
+              </a:spcAft>
+              <a:defRPr sz="2000">
+                <a:solidFill>
+                  <a:srgbClr val="ECFAFF"/>
+                </a:solidFill>
+              </a:defRPr>
+            </a:pPr>
+            <a:r>
+              <a:t>This is the main output of our mini project.</a:t>
+            </a:r>
+          </a:p>
+          <a:p>
+            <a:pPr>
+              <a:spcAft>
+                <a:spcPts val="600"/>
+              </a:spcAft>
+              <a:defRPr sz="2000">
+                <a:solidFill>
+                  <a:srgbClr val="ECFAFF"/>
+                </a:solidFill>
+              </a:defRPr>
+            </a:pPr>
+            <a:r>
+              <a:t>Screenshots should be added here after running the demo.</a:t>
+            </a:r>
+          </a:p>
+        </p:txBody>
+      </p:sp>
+    </p:spTree>
+  </p:cSld>
+  <p:clrMapOvr>
+    <a:masterClrMapping/>
+  </p:clrMapOvr>
+</p:sld>
+</file>
+
+<file path=ppt/slides/slide19.xml><?xml version="1.0" encoding="utf-8"?>
+<p:sld xmlns:a="http://schemas.openxmlformats.org/drawingml/2006/main" xmlns:p="http://schemas.openxmlformats.org/presentationml/2006/main" xmlns:r="http://schemas.openxmlformats.org/officeDocument/2006/relationships">
+  <p:cSld>
+    <p:spTree>
+      <p:nvGrpSpPr>
+        <p:cNvPr id="1" name=""/>
+        <p:cNvGrpSpPr/>
+        <p:nvPr/>
+      </p:nvGrpSpPr>
+      <p:grpSpPr/>
+      <p:pic>
+        <p:nvPicPr>
+          <p:cNvPr id="2" name="Picture 1" descr="network_security_background.png"/>
+          <p:cNvPicPr>
+            <a:picLocks noChangeAspect="1"/>
+          </p:cNvPicPr>
+          <p:nvPr/>
+        </p:nvPicPr>
+        <p:blipFill>
+          <a:blip r:embed="rId2"/>
+          <a:stretch>
+            <a:fillRect/>
+          </a:stretch>
+        </p:blipFill>
+        <p:spPr>
+          <a:xfrm>
+            <a:off x="0" y="0"/>
+            <a:ext cx="12191695" cy="6858000"/>
+          </a:xfrm>
+          <a:prstGeom prst="rect">
+            <a:avLst/>
+          </a:prstGeom>
+        </p:spPr>
+      </p:pic>
+      <p:sp>
+        <p:nvSpPr>
+          <p:cNvPr id="3" name="TextBox 2"/>
+          <p:cNvSpPr txBox="1"/>
+          <p:nvPr/>
+        </p:nvSpPr>
+        <p:spPr>
+          <a:xfrm>
+            <a:off x="502920" y="301752"/>
+            <a:ext cx="11155680" cy="658368"/>
+          </a:xfrm>
+          <a:prstGeom prst="rect">
+            <a:avLst/>
+          </a:prstGeom>
+          <a:solidFill>
+            <a:srgbClr val="040F1E"/>
+          </a:solidFill>
+          <a:ln>
+            <a:solidFill>
+              <a:srgbClr val="4BCDFF"/>
+            </a:solidFill>
+          </a:ln>
+        </p:spPr>
+        <p:txBody>
+          <a:bodyPr wrap="none">
+            <a:spAutoFit/>
+          </a:bodyPr>
+          <a:lstStyle/>
+          <a:p>
+            <a:pPr>
+              <a:defRPr b="1" sz="2500">
+                <a:solidFill>
+                  <a:srgbClr val="E8F8FF"/>
+                </a:solidFill>
+              </a:defRPr>
+            </a:pPr>
+            <a:r>
+              <a:t>Comparison Table</a:t>
+            </a:r>
+          </a:p>
+        </p:txBody>
+      </p:sp>
+      <p:sp>
+        <p:nvSpPr>
+          <p:cNvPr id="4" name="TextBox 3"/>
+          <p:cNvSpPr txBox="1"/>
+          <p:nvPr/>
+        </p:nvSpPr>
+        <p:spPr>
+          <a:xfrm>
+            <a:off x="685800" y="1234440"/>
+            <a:ext cx="10835640" cy="5074920"/>
+          </a:xfrm>
+          <a:prstGeom prst="rect">
+            <a:avLst/>
+          </a:prstGeom>
+          <a:solidFill>
+            <a:srgbClr val="051222"/>
+          </a:solidFill>
+          <a:ln>
+            <a:solidFill>
+              <a:srgbClr val="2282B4"/>
+            </a:solidFill>
+          </a:ln>
+        </p:spPr>
+        <p:txBody>
+          <a:bodyPr wrap="square" lIns="228600" rIns="201168" tIns="164592">
+            <a:spAutoFit/>
+          </a:bodyPr>
+          <a:lstStyle/>
+          <a:p>
+            <a:pPr>
+              <a:spcAft>
+                <a:spcPts val="600"/>
+              </a:spcAft>
+              <a:defRPr sz="2000">
+                <a:solidFill>
+                  <a:srgbClr val="ECFAFF"/>
+                </a:solidFill>
+              </a:defRPr>
+            </a:pPr>
+            <a:r>
+              <a:t>Port: 4444 plaintext, 4445 encrypted.</a:t>
+            </a:r>
+          </a:p>
+          <a:p>
+            <a:pPr>
+              <a:spcAft>
+                <a:spcPts val="600"/>
+              </a:spcAft>
+              <a:defRPr sz="2000">
+                <a:solidFill>
+                  <a:srgbClr val="ECFAFF"/>
+                </a:solidFill>
+              </a:defRPr>
+            </a:pPr>
+            <a:r>
+              <a:t>Wireshark readability: visible in plaintext, unreadable in encrypted channel.</a:t>
+            </a:r>
+          </a:p>
+          <a:p>
+            <a:pPr>
+              <a:spcAft>
+                <a:spcPts val="600"/>
+              </a:spcAft>
+              <a:defRPr sz="2000">
+                <a:solidFill>
+                  <a:srgbClr val="ECFAFF"/>
+                </a:solidFill>
+              </a:defRPr>
+            </a:pPr>
+            <a:r>
+              <a:t>Confidentiality: not protected vs protected.</a:t>
+            </a:r>
+          </a:p>
+          <a:p>
+            <a:pPr>
+              <a:spcAft>
+                <a:spcPts val="600"/>
+              </a:spcAft>
+              <a:defRPr sz="2000">
+                <a:solidFill>
+                  <a:srgbClr val="ECFAFF"/>
+                </a:solidFill>
+              </a:defRPr>
+            </a:pPr>
+            <a:r>
+              <a:t>Attacker result: can read message vs cannot read message.</a:t>
+            </a:r>
+          </a:p>
+          <a:p>
+            <a:pPr>
+              <a:spcAft>
+                <a:spcPts val="600"/>
+              </a:spcAft>
+              <a:defRPr sz="2000">
+                <a:solidFill>
+                  <a:srgbClr val="ECFAFF"/>
+                </a:solidFill>
+              </a:defRPr>
+            </a:pPr>
+            <a:r>
+              <a:t>Security lesson: sensitive data needs encryption.</a:t>
             </a:r>
           </a:p>
         </p:txBody>
@@ -5623,93 +7212,1323 @@
         <p:nvPr/>
       </p:nvGrpSpPr>
       <p:grpSpPr/>
-      <p:sp>
-        <p:nvSpPr>
-          <p:cNvPr id="2" name="Title 1"/>
-          <p:cNvSpPr>
-            <a:spLocks noGrp="1"/>
-          </p:cNvSpPr>
-          <p:nvPr>
-            <p:ph type="title"/>
-          </p:nvPr>
-        </p:nvSpPr>
-        <p:spPr/>
-        <p:txBody>
-          <a:bodyPr/>
-          <a:lstStyle/>
-          <a:p>
-            <a:pPr>
-              <a:defRPr b="1" sz="3000">
-                <a:solidFill>
-                  <a:srgbClr val="1F4E79"/>
-                </a:solidFill>
-              </a:defRPr>
-            </a:pPr>
-            <a:r>
-              <a:t>AAT Requirement Mapping</a:t>
-            </a:r>
-          </a:p>
-        </p:txBody>
-      </p:sp>
-      <p:sp>
-        <p:nvSpPr>
-          <p:cNvPr id="3" name="TextBox 2"/>
-          <p:cNvSpPr txBox="1"/>
+      <p:pic>
+        <p:nvPicPr>
+          <p:cNvPr id="2" name="Picture 1" descr="network_security_background.png"/>
+          <p:cNvPicPr>
+            <a:picLocks noChangeAspect="1"/>
+          </p:cNvPicPr>
           <p:nvPr/>
-        </p:nvSpPr>
+        </p:nvPicPr>
+        <p:blipFill>
+          <a:blip r:embed="rId2"/>
+          <a:stretch>
+            <a:fillRect/>
+          </a:stretch>
+        </p:blipFill>
         <p:spPr>
           <a:xfrm>
-            <a:off x="731520" y="1417320"/>
-            <a:ext cx="7955279" cy="4389120"/>
+            <a:off x="0" y="0"/>
+            <a:ext cx="12191695" cy="6858000"/>
           </a:xfrm>
           <a:prstGeom prst="rect">
             <a:avLst/>
           </a:prstGeom>
-          <a:noFill/>
         </p:spPr>
-        <p:txBody>
-          <a:bodyPr wrap="square">
+      </p:pic>
+      <p:sp>
+        <p:nvSpPr>
+          <p:cNvPr id="3" name="TextBox 2"/>
+          <p:cNvSpPr txBox="1"/>
+          <p:nvPr/>
+        </p:nvSpPr>
+        <p:spPr>
+          <a:xfrm>
+            <a:off x="502920" y="301752"/>
+            <a:ext cx="11155680" cy="658368"/>
+          </a:xfrm>
+          <a:prstGeom prst="rect">
+            <a:avLst/>
+          </a:prstGeom>
+          <a:solidFill>
+            <a:srgbClr val="040F1E"/>
+          </a:solidFill>
+          <a:ln>
+            <a:solidFill>
+              <a:srgbClr val="4BCDFF"/>
+            </a:solidFill>
+          </a:ln>
+        </p:spPr>
+        <p:txBody>
+          <a:bodyPr wrap="none">
             <a:spAutoFit/>
           </a:bodyPr>
           <a:lstStyle/>
           <a:p>
             <a:pPr>
-              <a:defRPr sz="2200"/>
-            </a:pPr>
-            <a:r>
-              <a:t>Tool introduction: Netcat / Ncat</a:t>
-            </a:r>
-          </a:p>
-          <a:p>
-            <a:pPr>
-              <a:defRPr sz="2200"/>
-            </a:pPr>
-            <a:r>
-              <a:t>Setup: Netcat, Ncat, Wireshark, OpenSSL</a:t>
-            </a:r>
-          </a:p>
-          <a:p>
-            <a:pPr>
-              <a:defRPr sz="2200"/>
-            </a:pPr>
-            <a:r>
-              <a:t>Practical demo: send same file in two ways</a:t>
-            </a:r>
-          </a:p>
-          <a:p>
-            <a:pPr>
-              <a:defRPr sz="2200"/>
-            </a:pPr>
-            <a:r>
-              <a:t>Cryptanalysis: capture traffic using Wireshark</a:t>
-            </a:r>
-          </a:p>
-          <a:p>
-            <a:pPr>
-              <a:defRPr sz="2200"/>
-            </a:pPr>
-            <a:r>
-              <a:t>Relevance: confidentiality in network security</a:t>
+              <a:defRPr b="1" sz="2500">
+                <a:solidFill>
+                  <a:srgbClr val="E8F8FF"/>
+                </a:solidFill>
+              </a:defRPr>
+            </a:pPr>
+            <a:r>
+              <a:t>Why We Chose This Topic</a:t>
+            </a:r>
+          </a:p>
+        </p:txBody>
+      </p:sp>
+      <p:sp>
+        <p:nvSpPr>
+          <p:cNvPr id="4" name="TextBox 3"/>
+          <p:cNvSpPr txBox="1"/>
+          <p:nvPr/>
+        </p:nvSpPr>
+        <p:spPr>
+          <a:xfrm>
+            <a:off x="685800" y="1234440"/>
+            <a:ext cx="10835640" cy="5074920"/>
+          </a:xfrm>
+          <a:prstGeom prst="rect">
+            <a:avLst/>
+          </a:prstGeom>
+          <a:solidFill>
+            <a:srgbClr val="051222"/>
+          </a:solidFill>
+          <a:ln>
+            <a:solidFill>
+              <a:srgbClr val="2282B4"/>
+            </a:solidFill>
+          </a:ln>
+        </p:spPr>
+        <p:txBody>
+          <a:bodyPr wrap="square" lIns="228600" rIns="201168" tIns="164592">
+            <a:spAutoFit/>
+          </a:bodyPr>
+          <a:lstStyle/>
+          <a:p>
+            <a:pPr>
+              <a:spcAft>
+                <a:spcPts val="600"/>
+              </a:spcAft>
+              <a:defRPr sz="2000">
+                <a:solidFill>
+                  <a:srgbClr val="ECFAFF"/>
+                </a:solidFill>
+              </a:defRPr>
+            </a:pPr>
+            <a:r>
+              <a:t>Easy to demonstrate using simple commands.</a:t>
+            </a:r>
+          </a:p>
+          <a:p>
+            <a:pPr>
+              <a:spcAft>
+                <a:spcPts val="600"/>
+              </a:spcAft>
+              <a:defRPr sz="2000">
+                <a:solidFill>
+                  <a:srgbClr val="ECFAFF"/>
+                </a:solidFill>
+              </a:defRPr>
+            </a:pPr>
+            <a:r>
+              <a:t>Directly connected to confidentiality in cryptography.</a:t>
+            </a:r>
+          </a:p>
+          <a:p>
+            <a:pPr>
+              <a:spcAft>
+                <a:spcPts val="600"/>
+              </a:spcAft>
+              <a:defRPr sz="2000">
+                <a:solidFill>
+                  <a:srgbClr val="ECFAFF"/>
+                </a:solidFill>
+              </a:defRPr>
+            </a:pPr>
+            <a:r>
+              <a:t>Shows a real security problem: packet sniffing.</a:t>
+            </a:r>
+          </a:p>
+          <a:p>
+            <a:pPr>
+              <a:spcAft>
+                <a:spcPts val="600"/>
+              </a:spcAft>
+              <a:defRPr sz="2000">
+                <a:solidFill>
+                  <a:srgbClr val="ECFAFF"/>
+                </a:solidFill>
+              </a:defRPr>
+            </a:pPr>
+            <a:r>
+              <a:t>Gives clear visual proof through Wireshark screenshots.</a:t>
+            </a:r>
+          </a:p>
+          <a:p>
+            <a:pPr>
+              <a:spcAft>
+                <a:spcPts val="600"/>
+              </a:spcAft>
+              <a:defRPr sz="2000">
+                <a:solidFill>
+                  <a:srgbClr val="ECFAFF"/>
+                </a:solidFill>
+              </a:defRPr>
+            </a:pPr>
+            <a:r>
+              <a:t>Suitable for a 10-mark practical AAT because it includes tool usage, demo, analysis, and conclusion.</a:t>
+            </a:r>
+          </a:p>
+        </p:txBody>
+      </p:sp>
+    </p:spTree>
+  </p:cSld>
+  <p:clrMapOvr>
+    <a:masterClrMapping/>
+  </p:clrMapOvr>
+</p:sld>
+</file>
+
+<file path=ppt/slides/slide20.xml><?xml version="1.0" encoding="utf-8"?>
+<p:sld xmlns:a="http://schemas.openxmlformats.org/drawingml/2006/main" xmlns:p="http://schemas.openxmlformats.org/presentationml/2006/main" xmlns:r="http://schemas.openxmlformats.org/officeDocument/2006/relationships">
+  <p:cSld>
+    <p:spTree>
+      <p:nvGrpSpPr>
+        <p:cNvPr id="1" name=""/>
+        <p:cNvGrpSpPr/>
+        <p:nvPr/>
+      </p:nvGrpSpPr>
+      <p:grpSpPr/>
+      <p:pic>
+        <p:nvPicPr>
+          <p:cNvPr id="2" name="Picture 1" descr="network_security_background.png"/>
+          <p:cNvPicPr>
+            <a:picLocks noChangeAspect="1"/>
+          </p:cNvPicPr>
+          <p:nvPr/>
+        </p:nvPicPr>
+        <p:blipFill>
+          <a:blip r:embed="rId2"/>
+          <a:stretch>
+            <a:fillRect/>
+          </a:stretch>
+        </p:blipFill>
+        <p:spPr>
+          <a:xfrm>
+            <a:off x="0" y="0"/>
+            <a:ext cx="12191695" cy="6858000"/>
+          </a:xfrm>
+          <a:prstGeom prst="rect">
+            <a:avLst/>
+          </a:prstGeom>
+        </p:spPr>
+      </p:pic>
+      <p:sp>
+        <p:nvSpPr>
+          <p:cNvPr id="3" name="TextBox 2"/>
+          <p:cNvSpPr txBox="1"/>
+          <p:nvPr/>
+        </p:nvSpPr>
+        <p:spPr>
+          <a:xfrm>
+            <a:off x="502920" y="301752"/>
+            <a:ext cx="11155680" cy="658368"/>
+          </a:xfrm>
+          <a:prstGeom prst="rect">
+            <a:avLst/>
+          </a:prstGeom>
+          <a:solidFill>
+            <a:srgbClr val="040F1E"/>
+          </a:solidFill>
+          <a:ln>
+            <a:solidFill>
+              <a:srgbClr val="4BCDFF"/>
+            </a:solidFill>
+          </a:ln>
+        </p:spPr>
+        <p:txBody>
+          <a:bodyPr wrap="none">
+            <a:spAutoFit/>
+          </a:bodyPr>
+          <a:lstStyle/>
+          <a:p>
+            <a:pPr>
+              <a:defRPr b="1" sz="2500">
+                <a:solidFill>
+                  <a:srgbClr val="E8F8FF"/>
+                </a:solidFill>
+              </a:defRPr>
+            </a:pPr>
+            <a:r>
+              <a:t>Applications / Relevance</a:t>
+            </a:r>
+          </a:p>
+        </p:txBody>
+      </p:sp>
+      <p:sp>
+        <p:nvSpPr>
+          <p:cNvPr id="4" name="TextBox 3"/>
+          <p:cNvSpPr txBox="1"/>
+          <p:nvPr/>
+        </p:nvSpPr>
+        <p:spPr>
+          <a:xfrm>
+            <a:off x="685800" y="1234440"/>
+            <a:ext cx="10835640" cy="5074920"/>
+          </a:xfrm>
+          <a:prstGeom prst="rect">
+            <a:avLst/>
+          </a:prstGeom>
+          <a:solidFill>
+            <a:srgbClr val="051222"/>
+          </a:solidFill>
+          <a:ln>
+            <a:solidFill>
+              <a:srgbClr val="2282B4"/>
+            </a:solidFill>
+          </a:ln>
+        </p:spPr>
+        <p:txBody>
+          <a:bodyPr wrap="square" lIns="228600" rIns="201168" tIns="164592">
+            <a:spAutoFit/>
+          </a:bodyPr>
+          <a:lstStyle/>
+          <a:p>
+            <a:pPr>
+              <a:spcAft>
+                <a:spcPts val="600"/>
+              </a:spcAft>
+              <a:defRPr sz="2000">
+                <a:solidFill>
+                  <a:srgbClr val="ECFAFF"/>
+                </a:solidFill>
+              </a:defRPr>
+            </a:pPr>
+            <a:r>
+              <a:t>HTTPS protects web browsing and login forms.</a:t>
+            </a:r>
+          </a:p>
+          <a:p>
+            <a:pPr>
+              <a:spcAft>
+                <a:spcPts val="600"/>
+              </a:spcAft>
+              <a:defRPr sz="2000">
+                <a:solidFill>
+                  <a:srgbClr val="ECFAFF"/>
+                </a:solidFill>
+              </a:defRPr>
+            </a:pPr>
+            <a:r>
+              <a:t>SSH protects remote terminal sessions.</a:t>
+            </a:r>
+          </a:p>
+          <a:p>
+            <a:pPr>
+              <a:spcAft>
+                <a:spcPts val="600"/>
+              </a:spcAft>
+              <a:defRPr sz="2000">
+                <a:solidFill>
+                  <a:srgbClr val="ECFAFF"/>
+                </a:solidFill>
+              </a:defRPr>
+            </a:pPr>
+            <a:r>
+              <a:t>VPNs protect traffic on unsafe networks.</a:t>
+            </a:r>
+          </a:p>
+          <a:p>
+            <a:pPr>
+              <a:spcAft>
+                <a:spcPts val="600"/>
+              </a:spcAft>
+              <a:defRPr sz="2000">
+                <a:solidFill>
+                  <a:srgbClr val="ECFAFF"/>
+                </a:solidFill>
+              </a:defRPr>
+            </a:pPr>
+            <a:r>
+              <a:t>Secure file transfer protects documents in transit.</a:t>
+            </a:r>
+          </a:p>
+          <a:p>
+            <a:pPr>
+              <a:spcAft>
+                <a:spcPts val="600"/>
+              </a:spcAft>
+              <a:defRPr sz="2000">
+                <a:solidFill>
+                  <a:srgbClr val="ECFAFF"/>
+                </a:solidFill>
+              </a:defRPr>
+            </a:pPr>
+            <a:r>
+              <a:t>Encrypted messaging protects private communication.</a:t>
+            </a:r>
+          </a:p>
+        </p:txBody>
+      </p:sp>
+    </p:spTree>
+  </p:cSld>
+  <p:clrMapOvr>
+    <a:masterClrMapping/>
+  </p:clrMapOvr>
+</p:sld>
+</file>
+
+<file path=ppt/slides/slide21.xml><?xml version="1.0" encoding="utf-8"?>
+<p:sld xmlns:a="http://schemas.openxmlformats.org/drawingml/2006/main" xmlns:p="http://schemas.openxmlformats.org/presentationml/2006/main" xmlns:r="http://schemas.openxmlformats.org/officeDocument/2006/relationships">
+  <p:cSld>
+    <p:spTree>
+      <p:nvGrpSpPr>
+        <p:cNvPr id="1" name=""/>
+        <p:cNvGrpSpPr/>
+        <p:nvPr/>
+      </p:nvGrpSpPr>
+      <p:grpSpPr/>
+      <p:pic>
+        <p:nvPicPr>
+          <p:cNvPr id="2" name="Picture 1" descr="network_security_background.png"/>
+          <p:cNvPicPr>
+            <a:picLocks noChangeAspect="1"/>
+          </p:cNvPicPr>
+          <p:nvPr/>
+        </p:nvPicPr>
+        <p:blipFill>
+          <a:blip r:embed="rId2"/>
+          <a:stretch>
+            <a:fillRect/>
+          </a:stretch>
+        </p:blipFill>
+        <p:spPr>
+          <a:xfrm>
+            <a:off x="0" y="0"/>
+            <a:ext cx="12191695" cy="6858000"/>
+          </a:xfrm>
+          <a:prstGeom prst="rect">
+            <a:avLst/>
+          </a:prstGeom>
+        </p:spPr>
+      </p:pic>
+      <p:sp>
+        <p:nvSpPr>
+          <p:cNvPr id="3" name="TextBox 2"/>
+          <p:cNvSpPr txBox="1"/>
+          <p:nvPr/>
+        </p:nvSpPr>
+        <p:spPr>
+          <a:xfrm>
+            <a:off x="502920" y="301752"/>
+            <a:ext cx="11155680" cy="658368"/>
+          </a:xfrm>
+          <a:prstGeom prst="rect">
+            <a:avLst/>
+          </a:prstGeom>
+          <a:solidFill>
+            <a:srgbClr val="040F1E"/>
+          </a:solidFill>
+          <a:ln>
+            <a:solidFill>
+              <a:srgbClr val="4BCDFF"/>
+            </a:solidFill>
+          </a:ln>
+        </p:spPr>
+        <p:txBody>
+          <a:bodyPr wrap="none">
+            <a:spAutoFit/>
+          </a:bodyPr>
+          <a:lstStyle/>
+          <a:p>
+            <a:pPr>
+              <a:defRPr b="1" sz="2500">
+                <a:solidFill>
+                  <a:srgbClr val="E8F8FF"/>
+                </a:solidFill>
+              </a:defRPr>
+            </a:pPr>
+            <a:r>
+              <a:t>Limitations</a:t>
+            </a:r>
+          </a:p>
+        </p:txBody>
+      </p:sp>
+      <p:sp>
+        <p:nvSpPr>
+          <p:cNvPr id="4" name="TextBox 3"/>
+          <p:cNvSpPr txBox="1"/>
+          <p:nvPr/>
+        </p:nvSpPr>
+        <p:spPr>
+          <a:xfrm>
+            <a:off x="685800" y="1234440"/>
+            <a:ext cx="10835640" cy="5074920"/>
+          </a:xfrm>
+          <a:prstGeom prst="rect">
+            <a:avLst/>
+          </a:prstGeom>
+          <a:solidFill>
+            <a:srgbClr val="051222"/>
+          </a:solidFill>
+          <a:ln>
+            <a:solidFill>
+              <a:srgbClr val="2282B4"/>
+            </a:solidFill>
+          </a:ln>
+        </p:spPr>
+        <p:txBody>
+          <a:bodyPr wrap="square" lIns="228600" rIns="201168" tIns="164592">
+            <a:spAutoFit/>
+          </a:bodyPr>
+          <a:lstStyle/>
+          <a:p>
+            <a:pPr>
+              <a:spcAft>
+                <a:spcPts val="600"/>
+              </a:spcAft>
+              <a:defRPr sz="2000">
+                <a:solidFill>
+                  <a:srgbClr val="ECFAFF"/>
+                </a:solidFill>
+              </a:defRPr>
+            </a:pPr>
+            <a:r>
+              <a:t>Traditional Netcat has no encryption by default.</a:t>
+            </a:r>
+          </a:p>
+          <a:p>
+            <a:pPr>
+              <a:spcAft>
+                <a:spcPts val="600"/>
+              </a:spcAft>
+              <a:defRPr sz="2000">
+                <a:solidFill>
+                  <a:srgbClr val="ECFAFF"/>
+                </a:solidFill>
+              </a:defRPr>
+            </a:pPr>
+            <a:r>
+              <a:t>Ncat SSL is good for learning and demonstration.</a:t>
+            </a:r>
+          </a:p>
+          <a:p>
+            <a:pPr>
+              <a:spcAft>
+                <a:spcPts val="600"/>
+              </a:spcAft>
+              <a:defRPr sz="2000">
+                <a:solidFill>
+                  <a:srgbClr val="ECFAFF"/>
+                </a:solidFill>
+              </a:defRPr>
+            </a:pPr>
+            <a:r>
+              <a:t>Self-signed certificates are not ideal for production.</a:t>
+            </a:r>
+          </a:p>
+          <a:p>
+            <a:pPr>
+              <a:spcAft>
+                <a:spcPts val="600"/>
+              </a:spcAft>
+              <a:defRPr sz="2000">
+                <a:solidFill>
+                  <a:srgbClr val="ECFAFF"/>
+                </a:solidFill>
+              </a:defRPr>
+            </a:pPr>
+            <a:r>
+              <a:t>Production systems usually use SSH, SCP, HTTPS, or VPN.</a:t>
+            </a:r>
+          </a:p>
+          <a:p>
+            <a:pPr>
+              <a:spcAft>
+                <a:spcPts val="600"/>
+              </a:spcAft>
+              <a:defRPr sz="2000">
+                <a:solidFill>
+                  <a:srgbClr val="ECFAFF"/>
+                </a:solidFill>
+              </a:defRPr>
+            </a:pPr>
+            <a:r>
+              <a:t>This project mainly focuses on confidentiality.</a:t>
+            </a:r>
+          </a:p>
+        </p:txBody>
+      </p:sp>
+    </p:spTree>
+  </p:cSld>
+  <p:clrMapOvr>
+    <a:masterClrMapping/>
+  </p:clrMapOvr>
+</p:sld>
+</file>
+
+<file path=ppt/slides/slide22.xml><?xml version="1.0" encoding="utf-8"?>
+<p:sld xmlns:a="http://schemas.openxmlformats.org/drawingml/2006/main" xmlns:p="http://schemas.openxmlformats.org/presentationml/2006/main" xmlns:r="http://schemas.openxmlformats.org/officeDocument/2006/relationships">
+  <p:cSld>
+    <p:spTree>
+      <p:nvGrpSpPr>
+        <p:cNvPr id="1" name=""/>
+        <p:cNvGrpSpPr/>
+        <p:nvPr/>
+      </p:nvGrpSpPr>
+      <p:grpSpPr/>
+      <p:pic>
+        <p:nvPicPr>
+          <p:cNvPr id="2" name="Picture 1" descr="network_security_background.png"/>
+          <p:cNvPicPr>
+            <a:picLocks noChangeAspect="1"/>
+          </p:cNvPicPr>
+          <p:nvPr/>
+        </p:nvPicPr>
+        <p:blipFill>
+          <a:blip r:embed="rId2"/>
+          <a:stretch>
+            <a:fillRect/>
+          </a:stretch>
+        </p:blipFill>
+        <p:spPr>
+          <a:xfrm>
+            <a:off x="0" y="0"/>
+            <a:ext cx="12191695" cy="6858000"/>
+          </a:xfrm>
+          <a:prstGeom prst="rect">
+            <a:avLst/>
+          </a:prstGeom>
+        </p:spPr>
+      </p:pic>
+      <p:sp>
+        <p:nvSpPr>
+          <p:cNvPr id="3" name="TextBox 2"/>
+          <p:cNvSpPr txBox="1"/>
+          <p:nvPr/>
+        </p:nvSpPr>
+        <p:spPr>
+          <a:xfrm>
+            <a:off x="502920" y="301752"/>
+            <a:ext cx="11155680" cy="658368"/>
+          </a:xfrm>
+          <a:prstGeom prst="rect">
+            <a:avLst/>
+          </a:prstGeom>
+          <a:solidFill>
+            <a:srgbClr val="040F1E"/>
+          </a:solidFill>
+          <a:ln>
+            <a:solidFill>
+              <a:srgbClr val="4BCDFF"/>
+            </a:solidFill>
+          </a:ln>
+        </p:spPr>
+        <p:txBody>
+          <a:bodyPr wrap="none">
+            <a:spAutoFit/>
+          </a:bodyPr>
+          <a:lstStyle/>
+          <a:p>
+            <a:pPr>
+              <a:defRPr b="1" sz="2500">
+                <a:solidFill>
+                  <a:srgbClr val="E8F8FF"/>
+                </a:solidFill>
+              </a:defRPr>
+            </a:pPr>
+            <a:r>
+              <a:t>Future Scope</a:t>
+            </a:r>
+          </a:p>
+        </p:txBody>
+      </p:sp>
+      <p:sp>
+        <p:nvSpPr>
+          <p:cNvPr id="4" name="TextBox 3"/>
+          <p:cNvSpPr txBox="1"/>
+          <p:nvPr/>
+        </p:nvSpPr>
+        <p:spPr>
+          <a:xfrm>
+            <a:off x="685800" y="1234440"/>
+            <a:ext cx="10835640" cy="5074920"/>
+          </a:xfrm>
+          <a:prstGeom prst="rect">
+            <a:avLst/>
+          </a:prstGeom>
+          <a:solidFill>
+            <a:srgbClr val="051222"/>
+          </a:solidFill>
+          <a:ln>
+            <a:solidFill>
+              <a:srgbClr val="2282B4"/>
+            </a:solidFill>
+          </a:ln>
+        </p:spPr>
+        <p:txBody>
+          <a:bodyPr wrap="square" lIns="228600" rIns="201168" tIns="164592">
+            <a:spAutoFit/>
+          </a:bodyPr>
+          <a:lstStyle/>
+          <a:p>
+            <a:pPr>
+              <a:spcAft>
+                <a:spcPts val="600"/>
+              </a:spcAft>
+              <a:defRPr sz="2000">
+                <a:solidFill>
+                  <a:srgbClr val="ECFAFF"/>
+                </a:solidFill>
+              </a:defRPr>
+            </a:pPr>
+            <a:r>
+              <a:t>Add certificate verification.</a:t>
+            </a:r>
+          </a:p>
+          <a:p>
+            <a:pPr>
+              <a:spcAft>
+                <a:spcPts val="600"/>
+              </a:spcAft>
+              <a:defRPr sz="2000">
+                <a:solidFill>
+                  <a:srgbClr val="ECFAFF"/>
+                </a:solidFill>
+              </a:defRPr>
+            </a:pPr>
+            <a:r>
+              <a:t>Compare the same demo with SSH/SCP.</a:t>
+            </a:r>
+          </a:p>
+          <a:p>
+            <a:pPr>
+              <a:spcAft>
+                <a:spcPts val="600"/>
+              </a:spcAft>
+              <a:defRPr sz="2000">
+                <a:solidFill>
+                  <a:srgbClr val="ECFAFF"/>
+                </a:solidFill>
+              </a:defRPr>
+            </a:pPr>
+            <a:r>
+              <a:t>Transfer a larger file and compare packet captures.</a:t>
+            </a:r>
+          </a:p>
+          <a:p>
+            <a:pPr>
+              <a:spcAft>
+                <a:spcPts val="600"/>
+              </a:spcAft>
+              <a:defRPr sz="2000">
+                <a:solidFill>
+                  <a:srgbClr val="ECFAFF"/>
+                </a:solidFill>
+              </a:defRPr>
+            </a:pPr>
+            <a:r>
+              <a:t>Use hashes to verify file integrity.</a:t>
+            </a:r>
+          </a:p>
+          <a:p>
+            <a:pPr>
+              <a:spcAft>
+                <a:spcPts val="600"/>
+              </a:spcAft>
+              <a:defRPr sz="2000">
+                <a:solidFill>
+                  <a:srgbClr val="ECFAFF"/>
+                </a:solidFill>
+              </a:defRPr>
+            </a:pPr>
+            <a:r>
+              <a:t>Explain how TLS in HTTPS follows a similar concept.</a:t>
+            </a:r>
+          </a:p>
+        </p:txBody>
+      </p:sp>
+    </p:spTree>
+  </p:cSld>
+  <p:clrMapOvr>
+    <a:masterClrMapping/>
+  </p:clrMapOvr>
+</p:sld>
+</file>
+
+<file path=ppt/slides/slide23.xml><?xml version="1.0" encoding="utf-8"?>
+<p:sld xmlns:a="http://schemas.openxmlformats.org/drawingml/2006/main" xmlns:p="http://schemas.openxmlformats.org/presentationml/2006/main" xmlns:r="http://schemas.openxmlformats.org/officeDocument/2006/relationships">
+  <p:cSld>
+    <p:spTree>
+      <p:nvGrpSpPr>
+        <p:cNvPr id="1" name=""/>
+        <p:cNvGrpSpPr/>
+        <p:nvPr/>
+      </p:nvGrpSpPr>
+      <p:grpSpPr/>
+      <p:pic>
+        <p:nvPicPr>
+          <p:cNvPr id="2" name="Picture 1" descr="network_security_background.png"/>
+          <p:cNvPicPr>
+            <a:picLocks noChangeAspect="1"/>
+          </p:cNvPicPr>
+          <p:nvPr/>
+        </p:nvPicPr>
+        <p:blipFill>
+          <a:blip r:embed="rId2"/>
+          <a:stretch>
+            <a:fillRect/>
+          </a:stretch>
+        </p:blipFill>
+        <p:spPr>
+          <a:xfrm>
+            <a:off x="0" y="0"/>
+            <a:ext cx="12191695" cy="6858000"/>
+          </a:xfrm>
+          <a:prstGeom prst="rect">
+            <a:avLst/>
+          </a:prstGeom>
+        </p:spPr>
+      </p:pic>
+      <p:sp>
+        <p:nvSpPr>
+          <p:cNvPr id="3" name="TextBox 2"/>
+          <p:cNvSpPr txBox="1"/>
+          <p:nvPr/>
+        </p:nvSpPr>
+        <p:spPr>
+          <a:xfrm>
+            <a:off x="502920" y="301752"/>
+            <a:ext cx="11155680" cy="658368"/>
+          </a:xfrm>
+          <a:prstGeom prst="rect">
+            <a:avLst/>
+          </a:prstGeom>
+          <a:solidFill>
+            <a:srgbClr val="040F1E"/>
+          </a:solidFill>
+          <a:ln>
+            <a:solidFill>
+              <a:srgbClr val="4BCDFF"/>
+            </a:solidFill>
+          </a:ln>
+        </p:spPr>
+        <p:txBody>
+          <a:bodyPr wrap="none">
+            <a:spAutoFit/>
+          </a:bodyPr>
+          <a:lstStyle/>
+          <a:p>
+            <a:pPr>
+              <a:defRPr b="1" sz="2500">
+                <a:solidFill>
+                  <a:srgbClr val="E8F8FF"/>
+                </a:solidFill>
+              </a:defRPr>
+            </a:pPr>
+            <a:r>
+              <a:t>Team Contribution</a:t>
+            </a:r>
+          </a:p>
+        </p:txBody>
+      </p:sp>
+      <p:sp>
+        <p:nvSpPr>
+          <p:cNvPr id="4" name="TextBox 3"/>
+          <p:cNvSpPr txBox="1"/>
+          <p:nvPr/>
+        </p:nvSpPr>
+        <p:spPr>
+          <a:xfrm>
+            <a:off x="685800" y="1234440"/>
+            <a:ext cx="10835640" cy="5074920"/>
+          </a:xfrm>
+          <a:prstGeom prst="rect">
+            <a:avLst/>
+          </a:prstGeom>
+          <a:solidFill>
+            <a:srgbClr val="051222"/>
+          </a:solidFill>
+          <a:ln>
+            <a:solidFill>
+              <a:srgbClr val="2282B4"/>
+            </a:solidFill>
+          </a:ln>
+        </p:spPr>
+        <p:txBody>
+          <a:bodyPr wrap="square" lIns="228600" rIns="201168" tIns="164592">
+            <a:spAutoFit/>
+          </a:bodyPr>
+          <a:lstStyle/>
+          <a:p>
+            <a:pPr>
+              <a:spcAft>
+                <a:spcPts val="600"/>
+              </a:spcAft>
+              <a:defRPr sz="2000">
+                <a:solidFill>
+                  <a:srgbClr val="ECFAFF"/>
+                </a:solidFill>
+              </a:defRPr>
+            </a:pPr>
+            <a:r>
+              <a:t>Tanishk: Netcat introduction, setup, plaintext demo.</a:t>
+            </a:r>
+          </a:p>
+          <a:p>
+            <a:pPr>
+              <a:spcAft>
+                <a:spcPts val="600"/>
+              </a:spcAft>
+              <a:defRPr sz="2000">
+                <a:solidFill>
+                  <a:srgbClr val="ECFAFF"/>
+                </a:solidFill>
+              </a:defRPr>
+            </a:pPr>
+            <a:r>
+              <a:t>Aastha: confidentiality theory, encryption explanation, Ncat SSL demo.</a:t>
+            </a:r>
+          </a:p>
+          <a:p>
+            <a:pPr>
+              <a:spcAft>
+                <a:spcPts val="600"/>
+              </a:spcAft>
+              <a:defRPr sz="2000">
+                <a:solidFill>
+                  <a:srgbClr val="ECFAFF"/>
+                </a:solidFill>
+              </a:defRPr>
+            </a:pPr>
+            <a:r>
+              <a:t>Aditi: Wireshark analysis, comparison table, conclusion.</a:t>
+            </a:r>
+          </a:p>
+          <a:p>
+            <a:pPr>
+              <a:spcAft>
+                <a:spcPts val="600"/>
+              </a:spcAft>
+              <a:defRPr sz="2000">
+                <a:solidFill>
+                  <a:srgbClr val="ECFAFF"/>
+                </a:solidFill>
+              </a:defRPr>
+            </a:pPr>
+            <a:r>
+              <a:t>All members: practice viva answers and screenshots.</a:t>
+            </a:r>
+          </a:p>
+          <a:p>
+            <a:pPr>
+              <a:spcAft>
+                <a:spcPts val="600"/>
+              </a:spcAft>
+              <a:defRPr sz="2000">
+                <a:solidFill>
+                  <a:srgbClr val="ECFAFF"/>
+                </a:solidFill>
+              </a:defRPr>
+            </a:pPr>
+            <a:r>
+              <a:t>Keep explanation simple and confidence-based.</a:t>
+            </a:r>
+          </a:p>
+        </p:txBody>
+      </p:sp>
+    </p:spTree>
+  </p:cSld>
+  <p:clrMapOvr>
+    <a:masterClrMapping/>
+  </p:clrMapOvr>
+</p:sld>
+</file>
+
+<file path=ppt/slides/slide24.xml><?xml version="1.0" encoding="utf-8"?>
+<p:sld xmlns:a="http://schemas.openxmlformats.org/drawingml/2006/main" xmlns:p="http://schemas.openxmlformats.org/presentationml/2006/main" xmlns:r="http://schemas.openxmlformats.org/officeDocument/2006/relationships">
+  <p:cSld>
+    <p:spTree>
+      <p:nvGrpSpPr>
+        <p:cNvPr id="1" name=""/>
+        <p:cNvGrpSpPr/>
+        <p:nvPr/>
+      </p:nvGrpSpPr>
+      <p:grpSpPr/>
+      <p:pic>
+        <p:nvPicPr>
+          <p:cNvPr id="2" name="Picture 1" descr="network_security_background.png"/>
+          <p:cNvPicPr>
+            <a:picLocks noChangeAspect="1"/>
+          </p:cNvPicPr>
+          <p:nvPr/>
+        </p:nvPicPr>
+        <p:blipFill>
+          <a:blip r:embed="rId2"/>
+          <a:stretch>
+            <a:fillRect/>
+          </a:stretch>
+        </p:blipFill>
+        <p:spPr>
+          <a:xfrm>
+            <a:off x="0" y="0"/>
+            <a:ext cx="12191695" cy="6858000"/>
+          </a:xfrm>
+          <a:prstGeom prst="rect">
+            <a:avLst/>
+          </a:prstGeom>
+        </p:spPr>
+      </p:pic>
+      <p:sp>
+        <p:nvSpPr>
+          <p:cNvPr id="3" name="TextBox 2"/>
+          <p:cNvSpPr txBox="1"/>
+          <p:nvPr/>
+        </p:nvSpPr>
+        <p:spPr>
+          <a:xfrm>
+            <a:off x="502920" y="301752"/>
+            <a:ext cx="11155680" cy="658368"/>
+          </a:xfrm>
+          <a:prstGeom prst="rect">
+            <a:avLst/>
+          </a:prstGeom>
+          <a:solidFill>
+            <a:srgbClr val="040F1E"/>
+          </a:solidFill>
+          <a:ln>
+            <a:solidFill>
+              <a:srgbClr val="4BCDFF"/>
+            </a:solidFill>
+          </a:ln>
+        </p:spPr>
+        <p:txBody>
+          <a:bodyPr wrap="none">
+            <a:spAutoFit/>
+          </a:bodyPr>
+          <a:lstStyle/>
+          <a:p>
+            <a:pPr>
+              <a:defRPr b="1" sz="2500">
+                <a:solidFill>
+                  <a:srgbClr val="E8F8FF"/>
+                </a:solidFill>
+              </a:defRPr>
+            </a:pPr>
+            <a:r>
+              <a:t>Final Conclusion</a:t>
+            </a:r>
+          </a:p>
+        </p:txBody>
+      </p:sp>
+      <p:sp>
+        <p:nvSpPr>
+          <p:cNvPr id="4" name="TextBox 3"/>
+          <p:cNvSpPr txBox="1"/>
+          <p:nvPr/>
+        </p:nvSpPr>
+        <p:spPr>
+          <a:xfrm>
+            <a:off x="685800" y="1234440"/>
+            <a:ext cx="10835640" cy="5074920"/>
+          </a:xfrm>
+          <a:prstGeom prst="rect">
+            <a:avLst/>
+          </a:prstGeom>
+          <a:solidFill>
+            <a:srgbClr val="051222"/>
+          </a:solidFill>
+          <a:ln>
+            <a:solidFill>
+              <a:srgbClr val="2282B4"/>
+            </a:solidFill>
+          </a:ln>
+        </p:spPr>
+        <p:txBody>
+          <a:bodyPr wrap="square" lIns="228600" rIns="201168" tIns="164592">
+            <a:spAutoFit/>
+          </a:bodyPr>
+          <a:lstStyle/>
+          <a:p>
+            <a:pPr>
+              <a:spcAft>
+                <a:spcPts val="600"/>
+              </a:spcAft>
+              <a:defRPr sz="2000">
+                <a:solidFill>
+                  <a:srgbClr val="ECFAFF"/>
+                </a:solidFill>
+              </a:defRPr>
+            </a:pPr>
+            <a:r>
+              <a:t>Normal Netcat sends data in plaintext.</a:t>
+            </a:r>
+          </a:p>
+          <a:p>
+            <a:pPr>
+              <a:spcAft>
+                <a:spcPts val="600"/>
+              </a:spcAft>
+              <a:defRPr sz="2000">
+                <a:solidFill>
+                  <a:srgbClr val="ECFAFF"/>
+                </a:solidFill>
+              </a:defRPr>
+            </a:pPr>
+            <a:r>
+              <a:t>Plaintext data is readable in Wireshark.</a:t>
+            </a:r>
+          </a:p>
+          <a:p>
+            <a:pPr>
+              <a:spcAft>
+                <a:spcPts val="600"/>
+              </a:spcAft>
+              <a:defRPr sz="2000">
+                <a:solidFill>
+                  <a:srgbClr val="ECFAFF"/>
+                </a:solidFill>
+              </a:defRPr>
+            </a:pPr>
+            <a:r>
+              <a:t>Ncat SSL encrypts the communication channel.</a:t>
+            </a:r>
+          </a:p>
+          <a:p>
+            <a:pPr>
+              <a:spcAft>
+                <a:spcPts val="600"/>
+              </a:spcAft>
+              <a:defRPr sz="2000">
+                <a:solidFill>
+                  <a:srgbClr val="ECFAFF"/>
+                </a:solidFill>
+              </a:defRPr>
+            </a:pPr>
+            <a:r>
+              <a:t>Encrypted traffic hides the original message from observers.</a:t>
+            </a:r>
+          </a:p>
+          <a:p>
+            <a:pPr>
+              <a:spcAft>
+                <a:spcPts val="600"/>
+              </a:spcAft>
+              <a:defRPr sz="2000">
+                <a:solidFill>
+                  <a:srgbClr val="ECFAFF"/>
+                </a:solidFill>
+              </a:defRPr>
+            </a:pPr>
+            <a:r>
+              <a:t>Therefore, encryption is necessary for confidential data transmission.</a:t>
+            </a:r>
+          </a:p>
+        </p:txBody>
+      </p:sp>
+    </p:spTree>
+  </p:cSld>
+  <p:clrMapOvr>
+    <a:masterClrMapping/>
+  </p:clrMapOvr>
+</p:sld>
+</file>
+
+<file path=ppt/slides/slide25.xml><?xml version="1.0" encoding="utf-8"?>
+<p:sld xmlns:a="http://schemas.openxmlformats.org/drawingml/2006/main" xmlns:p="http://schemas.openxmlformats.org/presentationml/2006/main" xmlns:r="http://schemas.openxmlformats.org/officeDocument/2006/relationships">
+  <p:cSld>
+    <p:spTree>
+      <p:nvGrpSpPr>
+        <p:cNvPr id="1" name=""/>
+        <p:cNvGrpSpPr/>
+        <p:nvPr/>
+      </p:nvGrpSpPr>
+      <p:grpSpPr/>
+      <p:pic>
+        <p:nvPicPr>
+          <p:cNvPr id="2" name="Picture 1" descr="network_security_background.png"/>
+          <p:cNvPicPr>
+            <a:picLocks noChangeAspect="1"/>
+          </p:cNvPicPr>
+          <p:nvPr/>
+        </p:nvPicPr>
+        <p:blipFill>
+          <a:blip r:embed="rId2"/>
+          <a:stretch>
+            <a:fillRect/>
+          </a:stretch>
+        </p:blipFill>
+        <p:spPr>
+          <a:xfrm>
+            <a:off x="0" y="0"/>
+            <a:ext cx="12191695" cy="6858000"/>
+          </a:xfrm>
+          <a:prstGeom prst="rect">
+            <a:avLst/>
+          </a:prstGeom>
+        </p:spPr>
+      </p:pic>
+      <p:sp>
+        <p:nvSpPr>
+          <p:cNvPr id="3" name="TextBox 2"/>
+          <p:cNvSpPr txBox="1"/>
+          <p:nvPr/>
+        </p:nvSpPr>
+        <p:spPr>
+          <a:xfrm>
+            <a:off x="502920" y="301752"/>
+            <a:ext cx="11155680" cy="658368"/>
+          </a:xfrm>
+          <a:prstGeom prst="rect">
+            <a:avLst/>
+          </a:prstGeom>
+          <a:solidFill>
+            <a:srgbClr val="040F1E"/>
+          </a:solidFill>
+          <a:ln>
+            <a:solidFill>
+              <a:srgbClr val="4BCDFF"/>
+            </a:solidFill>
+          </a:ln>
+        </p:spPr>
+        <p:txBody>
+          <a:bodyPr wrap="none">
+            <a:spAutoFit/>
+          </a:bodyPr>
+          <a:lstStyle/>
+          <a:p>
+            <a:pPr>
+              <a:defRPr b="1" sz="2500">
+                <a:solidFill>
+                  <a:srgbClr val="E8F8FF"/>
+                </a:solidFill>
+              </a:defRPr>
+            </a:pPr>
+            <a:r>
+              <a:t>Command Reference for Demo</a:t>
+            </a:r>
+          </a:p>
+        </p:txBody>
+      </p:sp>
+      <p:sp>
+        <p:nvSpPr>
+          <p:cNvPr id="4" name="TextBox 3"/>
+          <p:cNvSpPr txBox="1"/>
+          <p:nvPr/>
+        </p:nvSpPr>
+        <p:spPr>
+          <a:xfrm>
+            <a:off x="777240" y="1920240"/>
+            <a:ext cx="10652760" cy="3383280"/>
+          </a:xfrm>
+          <a:prstGeom prst="rect">
+            <a:avLst/>
+          </a:prstGeom>
+          <a:solidFill>
+            <a:srgbClr val="000810"/>
+          </a:solidFill>
+          <a:ln>
+            <a:solidFill>
+              <a:srgbClr val="59DDFF"/>
+            </a:solidFill>
+          </a:ln>
+        </p:spPr>
+        <p:txBody>
+          <a:bodyPr wrap="none">
+            <a:spAutoFit/>
+          </a:bodyPr>
+          <a:lstStyle/>
+          <a:p>
+            <a:pPr>
+              <a:defRPr b="1" sz="2100">
+                <a:solidFill>
+                  <a:srgbClr val="FFFFFF"/>
+                </a:solidFill>
+                <a:latin typeface="Aptos"/>
+              </a:defRPr>
+            </a:pPr>
+            <a:r>
+              <a:t>Copy these during demo:</a:t>
+            </a:r>
+          </a:p>
+          <a:p>
+            <a:pPr>
+              <a:defRPr b="0" sz="1800">
+                <a:solidFill>
+                  <a:srgbClr val="A0F2FF"/>
+                </a:solidFill>
+                <a:latin typeface="Courier New"/>
+              </a:defRPr>
+            </a:pPr>
+            <a:r>
+              <a:t>echo "This is confidential CRP data from Tanishk, Aastha and Aditi." &gt; secret_message.txt</a:t>
+            </a:r>
+          </a:p>
+          <a:p>
+            <a:pPr>
+              <a:defRPr b="0" sz="1800">
+                <a:solidFill>
+                  <a:srgbClr val="A0F2FF"/>
+                </a:solidFill>
+                <a:latin typeface="Courier New"/>
+              </a:defRPr>
+            </a:pPr>
+            <a:r>
+              <a:t>nc -lvnp 4444 &gt; received_plain.txt</a:t>
+            </a:r>
+          </a:p>
+          <a:p>
+            <a:pPr>
+              <a:defRPr b="0" sz="1800">
+                <a:solidFill>
+                  <a:srgbClr val="A0F2FF"/>
+                </a:solidFill>
+                <a:latin typeface="Courier New"/>
+              </a:defRPr>
+            </a:pPr>
+            <a:r>
+              <a:t>nc 127.0.0.1 4444 &lt; secret_message.txt</a:t>
+            </a:r>
+          </a:p>
+          <a:p>
+            <a:pPr>
+              <a:defRPr b="0" sz="1800">
+                <a:solidFill>
+                  <a:srgbClr val="A0F2FF"/>
+                </a:solidFill>
+                <a:latin typeface="Courier New"/>
+              </a:defRPr>
+            </a:pPr>
+            <a:r>
+              <a:t>openssl req -x509 -newkey rsa:2048 -nodes -keyout server.key -out server.crt -days 1 -subj "/CN=NetcatAAT"</a:t>
+            </a:r>
+          </a:p>
+          <a:p>
+            <a:pPr>
+              <a:defRPr b="0" sz="1800">
+                <a:solidFill>
+                  <a:srgbClr val="A0F2FF"/>
+                </a:solidFill>
+                <a:latin typeface="Courier New"/>
+              </a:defRPr>
+            </a:pPr>
+            <a:r>
+              <a:t>ncat --ssl --ssl-cert server.crt --ssl-key server.key -lvnp 4445 &gt; received_secure.txt</a:t>
+            </a:r>
+          </a:p>
+          <a:p>
+            <a:pPr>
+              <a:defRPr b="0" sz="1800">
+                <a:solidFill>
+                  <a:srgbClr val="A0F2FF"/>
+                </a:solidFill>
+                <a:latin typeface="Courier New"/>
+              </a:defRPr>
+            </a:pPr>
+            <a:r>
+              <a:t>ncat --ssl 127.0.0.1 4445 &lt; secret_message.txt</a:t>
             </a:r>
           </a:p>
         </p:txBody>
@@ -5732,85 +8551,188 @@
         <p:nvPr/>
       </p:nvGrpSpPr>
       <p:grpSpPr/>
-      <p:sp>
-        <p:nvSpPr>
-          <p:cNvPr id="2" name="Title 1"/>
-          <p:cNvSpPr>
-            <a:spLocks noGrp="1"/>
-          </p:cNvSpPr>
-          <p:nvPr>
-            <p:ph type="title"/>
-          </p:nvPr>
-        </p:nvSpPr>
-        <p:spPr/>
-        <p:txBody>
-          <a:bodyPr/>
-          <a:lstStyle/>
-          <a:p>
-            <a:pPr>
-              <a:defRPr b="1" sz="3000">
-                <a:solidFill>
-                  <a:srgbClr val="1F4E79"/>
-                </a:solidFill>
-              </a:defRPr>
-            </a:pPr>
-            <a:r>
-              <a:t>Problem Statement</a:t>
-            </a:r>
-          </a:p>
-        </p:txBody>
-      </p:sp>
-      <p:sp>
-        <p:nvSpPr>
-          <p:cNvPr id="3" name="TextBox 2"/>
-          <p:cNvSpPr txBox="1"/>
+      <p:pic>
+        <p:nvPicPr>
+          <p:cNvPr id="2" name="Picture 1" descr="network_security_background.png"/>
+          <p:cNvPicPr>
+            <a:picLocks noChangeAspect="1"/>
+          </p:cNvPicPr>
           <p:nvPr/>
-        </p:nvSpPr>
+        </p:nvPicPr>
+        <p:blipFill>
+          <a:blip r:embed="rId2"/>
+          <a:stretch>
+            <a:fillRect/>
+          </a:stretch>
+        </p:blipFill>
         <p:spPr>
           <a:xfrm>
-            <a:off x="731520" y="1417320"/>
-            <a:ext cx="7955279" cy="4389120"/>
+            <a:off x="0" y="0"/>
+            <a:ext cx="12191695" cy="6858000"/>
           </a:xfrm>
           <a:prstGeom prst="rect">
             <a:avLst/>
           </a:prstGeom>
-          <a:noFill/>
         </p:spPr>
-        <p:txBody>
-          <a:bodyPr wrap="square">
+      </p:pic>
+      <p:sp>
+        <p:nvSpPr>
+          <p:cNvPr id="3" name="TextBox 2"/>
+          <p:cNvSpPr txBox="1"/>
+          <p:nvPr/>
+        </p:nvSpPr>
+        <p:spPr>
+          <a:xfrm>
+            <a:off x="502920" y="301752"/>
+            <a:ext cx="11155680" cy="658368"/>
+          </a:xfrm>
+          <a:prstGeom prst="rect">
+            <a:avLst/>
+          </a:prstGeom>
+          <a:solidFill>
+            <a:srgbClr val="040F1E"/>
+          </a:solidFill>
+          <a:ln>
+            <a:solidFill>
+              <a:srgbClr val="4BCDFF"/>
+            </a:solidFill>
+          </a:ln>
+        </p:spPr>
+        <p:txBody>
+          <a:bodyPr wrap="none">
             <a:spAutoFit/>
           </a:bodyPr>
           <a:lstStyle/>
           <a:p>
             <a:pPr>
-              <a:defRPr sz="2200"/>
-            </a:pPr>
-            <a:r>
-              <a:t>Data sent over a network can be captured by attackers.</a:t>
-            </a:r>
-          </a:p>
-          <a:p>
-            <a:pPr>
-              <a:defRPr sz="2200"/>
-            </a:pPr>
-            <a:r>
-              <a:t>If the channel is plaintext, the message is readable.</a:t>
-            </a:r>
-          </a:p>
-          <a:p>
-            <a:pPr>
-              <a:defRPr sz="2200"/>
-            </a:pPr>
-            <a:r>
-              <a:t>Confidential data must be protected using encryption.</a:t>
-            </a:r>
-          </a:p>
-          <a:p>
-            <a:pPr>
-              <a:defRPr sz="2200"/>
-            </a:pPr>
-            <a:r>
-              <a:t>Our project proves this with a simple Netcat demo.</a:t>
+              <a:defRPr b="1" sz="2500">
+                <a:solidFill>
+                  <a:srgbClr val="E8F8FF"/>
+                </a:solidFill>
+              </a:defRPr>
+            </a:pPr>
+            <a:r>
+              <a:t>AAT Requirement Mapping</a:t>
+            </a:r>
+          </a:p>
+        </p:txBody>
+      </p:sp>
+      <p:sp>
+        <p:nvSpPr>
+          <p:cNvPr id="4" name="TextBox 3"/>
+          <p:cNvSpPr txBox="1"/>
+          <p:nvPr/>
+        </p:nvSpPr>
+        <p:spPr>
+          <a:xfrm>
+            <a:off x="685800" y="1234440"/>
+            <a:ext cx="10835640" cy="5074920"/>
+          </a:xfrm>
+          <a:prstGeom prst="rect">
+            <a:avLst/>
+          </a:prstGeom>
+          <a:solidFill>
+            <a:srgbClr val="051222"/>
+          </a:solidFill>
+          <a:ln>
+            <a:solidFill>
+              <a:srgbClr val="2282B4"/>
+            </a:solidFill>
+          </a:ln>
+        </p:spPr>
+        <p:txBody>
+          <a:bodyPr wrap="square" lIns="228600" rIns="201168" tIns="164592">
+            <a:spAutoFit/>
+          </a:bodyPr>
+          <a:lstStyle/>
+          <a:p>
+            <a:pPr>
+              <a:spcAft>
+                <a:spcPts val="600"/>
+              </a:spcAft>
+              <a:defRPr sz="2000">
+                <a:solidFill>
+                  <a:srgbClr val="ECFAFF"/>
+                </a:solidFill>
+              </a:defRPr>
+            </a:pPr>
+            <a:r>
+              <a:t>Introduction of tool: Netcat/Ncat explained.</a:t>
+            </a:r>
+          </a:p>
+          <a:p>
+            <a:pPr>
+              <a:spcAft>
+                <a:spcPts val="600"/>
+              </a:spcAft>
+              <a:defRPr sz="2000">
+                <a:solidFill>
+                  <a:srgbClr val="ECFAFF"/>
+                </a:solidFill>
+              </a:defRPr>
+            </a:pPr>
+            <a:r>
+              <a:t>Installation/setup: commands and required software included.</a:t>
+            </a:r>
+          </a:p>
+          <a:p>
+            <a:pPr>
+              <a:spcAft>
+                <a:spcPts val="600"/>
+              </a:spcAft>
+              <a:defRPr sz="2000">
+                <a:solidFill>
+                  <a:srgbClr val="ECFAFF"/>
+                </a:solidFill>
+              </a:defRPr>
+            </a:pPr>
+            <a:r>
+              <a:t>Practical demonstration: plaintext vs encrypted transfer.</a:t>
+            </a:r>
+          </a:p>
+          <a:p>
+            <a:pPr>
+              <a:spcAft>
+                <a:spcPts val="600"/>
+              </a:spcAft>
+              <a:defRPr sz="2000">
+                <a:solidFill>
+                  <a:srgbClr val="ECFAFF"/>
+                </a:solidFill>
+              </a:defRPr>
+            </a:pPr>
+            <a:r>
+              <a:t>Cryptanalysis: Wireshark packet sniffing and TCP stream inspection.</a:t>
+            </a:r>
+          </a:p>
+          <a:p>
+            <a:pPr>
+              <a:spcAft>
+                <a:spcPts val="600"/>
+              </a:spcAft>
+              <a:defRPr sz="2000">
+                <a:solidFill>
+                  <a:srgbClr val="ECFAFF"/>
+                </a:solidFill>
+              </a:defRPr>
+            </a:pPr>
+            <a:r>
+              <a:t>Application/relevance: HTTPS, SSH, VPN, secure file transfer.</a:t>
+            </a:r>
+          </a:p>
+          <a:p>
+            <a:pPr>
+              <a:spcAft>
+                <a:spcPts val="600"/>
+              </a:spcAft>
+              <a:defRPr sz="2000">
+                <a:solidFill>
+                  <a:srgbClr val="ECFAFF"/>
+                </a:solidFill>
+              </a:defRPr>
+            </a:pPr>
+            <a:r>
+              <a:t>Report + oral presentation: ready report, PPT, script, viva Q&amp;A.</a:t>
             </a:r>
           </a:p>
         </p:txBody>
@@ -5833,85 +8755,173 @@
         <p:nvPr/>
       </p:nvGrpSpPr>
       <p:grpSpPr/>
-      <p:sp>
-        <p:nvSpPr>
-          <p:cNvPr id="2" name="Title 1"/>
-          <p:cNvSpPr>
-            <a:spLocks noGrp="1"/>
-          </p:cNvSpPr>
-          <p:nvPr>
-            <p:ph type="title"/>
-          </p:nvPr>
-        </p:nvSpPr>
-        <p:spPr/>
-        <p:txBody>
-          <a:bodyPr/>
-          <a:lstStyle/>
-          <a:p>
-            <a:pPr>
-              <a:defRPr b="1" sz="3000">
-                <a:solidFill>
-                  <a:srgbClr val="1F4E79"/>
-                </a:solidFill>
-              </a:defRPr>
-            </a:pPr>
-            <a:r>
-              <a:t>What is Netcat?</a:t>
-            </a:r>
-          </a:p>
-        </p:txBody>
-      </p:sp>
-      <p:sp>
-        <p:nvSpPr>
-          <p:cNvPr id="3" name="TextBox 2"/>
-          <p:cNvSpPr txBox="1"/>
+      <p:pic>
+        <p:nvPicPr>
+          <p:cNvPr id="2" name="Picture 1" descr="network_security_background.png"/>
+          <p:cNvPicPr>
+            <a:picLocks noChangeAspect="1"/>
+          </p:cNvPicPr>
           <p:nvPr/>
-        </p:nvSpPr>
+        </p:nvPicPr>
+        <p:blipFill>
+          <a:blip r:embed="rId2"/>
+          <a:stretch>
+            <a:fillRect/>
+          </a:stretch>
+        </p:blipFill>
         <p:spPr>
           <a:xfrm>
-            <a:off x="731520" y="1417320"/>
-            <a:ext cx="7955279" cy="4389120"/>
+            <a:off x="0" y="0"/>
+            <a:ext cx="12191695" cy="6858000"/>
           </a:xfrm>
           <a:prstGeom prst="rect">
             <a:avLst/>
           </a:prstGeom>
-          <a:noFill/>
         </p:spPr>
-        <p:txBody>
-          <a:bodyPr wrap="square">
+      </p:pic>
+      <p:sp>
+        <p:nvSpPr>
+          <p:cNvPr id="3" name="TextBox 2"/>
+          <p:cNvSpPr txBox="1"/>
+          <p:nvPr/>
+        </p:nvSpPr>
+        <p:spPr>
+          <a:xfrm>
+            <a:off x="502920" y="301752"/>
+            <a:ext cx="11155680" cy="658368"/>
+          </a:xfrm>
+          <a:prstGeom prst="rect">
+            <a:avLst/>
+          </a:prstGeom>
+          <a:solidFill>
+            <a:srgbClr val="040F1E"/>
+          </a:solidFill>
+          <a:ln>
+            <a:solidFill>
+              <a:srgbClr val="4BCDFF"/>
+            </a:solidFill>
+          </a:ln>
+        </p:spPr>
+        <p:txBody>
+          <a:bodyPr wrap="none">
             <a:spAutoFit/>
           </a:bodyPr>
           <a:lstStyle/>
           <a:p>
             <a:pPr>
-              <a:defRPr sz="2200"/>
-            </a:pPr>
-            <a:r>
-              <a:t>Netcat is a command-line networking tool.</a:t>
-            </a:r>
-          </a:p>
-          <a:p>
-            <a:pPr>
-              <a:defRPr sz="2200"/>
-            </a:pPr>
-            <a:r>
-              <a:t>It can send and receive data over TCP/UDP.</a:t>
-            </a:r>
-          </a:p>
-          <a:p>
-            <a:pPr>
-              <a:defRPr sz="2200"/>
-            </a:pPr>
-            <a:r>
-              <a:t>It is useful for testing, file transfer, and debugging.</a:t>
-            </a:r>
-          </a:p>
-          <a:p>
-            <a:pPr>
-              <a:defRPr sz="2200"/>
-            </a:pPr>
-            <a:r>
-              <a:t>Traditional Netcat does not encrypt data.</a:t>
+              <a:defRPr b="1" sz="2500">
+                <a:solidFill>
+                  <a:srgbClr val="E8F8FF"/>
+                </a:solidFill>
+              </a:defRPr>
+            </a:pPr>
+            <a:r>
+              <a:t>Problem Statement</a:t>
+            </a:r>
+          </a:p>
+        </p:txBody>
+      </p:sp>
+      <p:sp>
+        <p:nvSpPr>
+          <p:cNvPr id="4" name="TextBox 3"/>
+          <p:cNvSpPr txBox="1"/>
+          <p:nvPr/>
+        </p:nvSpPr>
+        <p:spPr>
+          <a:xfrm>
+            <a:off x="685800" y="1234440"/>
+            <a:ext cx="10835640" cy="5074920"/>
+          </a:xfrm>
+          <a:prstGeom prst="rect">
+            <a:avLst/>
+          </a:prstGeom>
+          <a:solidFill>
+            <a:srgbClr val="051222"/>
+          </a:solidFill>
+          <a:ln>
+            <a:solidFill>
+              <a:srgbClr val="2282B4"/>
+            </a:solidFill>
+          </a:ln>
+        </p:spPr>
+        <p:txBody>
+          <a:bodyPr wrap="square" lIns="228600" rIns="201168" tIns="164592">
+            <a:spAutoFit/>
+          </a:bodyPr>
+          <a:lstStyle/>
+          <a:p>
+            <a:pPr>
+              <a:spcAft>
+                <a:spcPts val="600"/>
+              </a:spcAft>
+              <a:defRPr sz="2000">
+                <a:solidFill>
+                  <a:srgbClr val="ECFAFF"/>
+                </a:solidFill>
+              </a:defRPr>
+            </a:pPr>
+            <a:r>
+              <a:t>Data sent over a network travels as packets.</a:t>
+            </a:r>
+          </a:p>
+          <a:p>
+            <a:pPr>
+              <a:spcAft>
+                <a:spcPts val="600"/>
+              </a:spcAft>
+              <a:defRPr sz="2000">
+                <a:solidFill>
+                  <a:srgbClr val="ECFAFF"/>
+                </a:solidFill>
+              </a:defRPr>
+            </a:pPr>
+            <a:r>
+              <a:t>If packets are not encrypted, captured traffic may reveal the message.</a:t>
+            </a:r>
+          </a:p>
+          <a:p>
+            <a:pPr>
+              <a:spcAft>
+                <a:spcPts val="600"/>
+              </a:spcAft>
+              <a:defRPr sz="2000">
+                <a:solidFill>
+                  <a:srgbClr val="ECFAFF"/>
+                </a:solidFill>
+              </a:defRPr>
+            </a:pPr>
+            <a:r>
+              <a:t>Attackers can use packet sniffers on unsafe networks.</a:t>
+            </a:r>
+          </a:p>
+          <a:p>
+            <a:pPr>
+              <a:spcAft>
+                <a:spcPts val="600"/>
+              </a:spcAft>
+              <a:defRPr sz="2000">
+                <a:solidFill>
+                  <a:srgbClr val="ECFAFF"/>
+                </a:solidFill>
+              </a:defRPr>
+            </a:pPr>
+            <a:r>
+              <a:t>We demonstrate this risk with normal Netcat.</a:t>
+            </a:r>
+          </a:p>
+          <a:p>
+            <a:pPr>
+              <a:spcAft>
+                <a:spcPts val="600"/>
+              </a:spcAft>
+              <a:defRPr sz="2000">
+                <a:solidFill>
+                  <a:srgbClr val="ECFAFF"/>
+                </a:solidFill>
+              </a:defRPr>
+            </a:pPr>
+            <a:r>
+              <a:t>Then we demonstrate confidentiality using encrypted Ncat SSL.</a:t>
             </a:r>
           </a:p>
         </p:txBody>
@@ -5934,85 +8944,173 @@
         <p:nvPr/>
       </p:nvGrpSpPr>
       <p:grpSpPr/>
-      <p:sp>
-        <p:nvSpPr>
-          <p:cNvPr id="2" name="Title 1"/>
-          <p:cNvSpPr>
-            <a:spLocks noGrp="1"/>
-          </p:cNvSpPr>
-          <p:nvPr>
-            <p:ph type="title"/>
-          </p:nvPr>
-        </p:nvSpPr>
-        <p:spPr/>
-        <p:txBody>
-          <a:bodyPr/>
-          <a:lstStyle/>
-          <a:p>
-            <a:pPr>
-              <a:defRPr b="1" sz="3000">
-                <a:solidFill>
-                  <a:srgbClr val="1F4E79"/>
-                </a:solidFill>
-              </a:defRPr>
-            </a:pPr>
-            <a:r>
-              <a:t>Key Security Concept: Confidentiality</a:t>
-            </a:r>
-          </a:p>
-        </p:txBody>
-      </p:sp>
-      <p:sp>
-        <p:nvSpPr>
-          <p:cNvPr id="3" name="TextBox 2"/>
-          <p:cNvSpPr txBox="1"/>
+      <p:pic>
+        <p:nvPicPr>
+          <p:cNvPr id="2" name="Picture 1" descr="network_security_background.png"/>
+          <p:cNvPicPr>
+            <a:picLocks noChangeAspect="1"/>
+          </p:cNvPicPr>
           <p:nvPr/>
-        </p:nvSpPr>
+        </p:nvPicPr>
+        <p:blipFill>
+          <a:blip r:embed="rId2"/>
+          <a:stretch>
+            <a:fillRect/>
+          </a:stretch>
+        </p:blipFill>
         <p:spPr>
           <a:xfrm>
-            <a:off x="731520" y="1417320"/>
-            <a:ext cx="7955279" cy="4389120"/>
+            <a:off x="0" y="0"/>
+            <a:ext cx="12191695" cy="6858000"/>
           </a:xfrm>
           <a:prstGeom prst="rect">
             <a:avLst/>
           </a:prstGeom>
-          <a:noFill/>
         </p:spPr>
-        <p:txBody>
-          <a:bodyPr wrap="square">
+      </p:pic>
+      <p:sp>
+        <p:nvSpPr>
+          <p:cNvPr id="3" name="TextBox 2"/>
+          <p:cNvSpPr txBox="1"/>
+          <p:nvPr/>
+        </p:nvSpPr>
+        <p:spPr>
+          <a:xfrm>
+            <a:off x="502920" y="301752"/>
+            <a:ext cx="11155680" cy="658368"/>
+          </a:xfrm>
+          <a:prstGeom prst="rect">
+            <a:avLst/>
+          </a:prstGeom>
+          <a:solidFill>
+            <a:srgbClr val="040F1E"/>
+          </a:solidFill>
+          <a:ln>
+            <a:solidFill>
+              <a:srgbClr val="4BCDFF"/>
+            </a:solidFill>
+          </a:ln>
+        </p:spPr>
+        <p:txBody>
+          <a:bodyPr wrap="none">
             <a:spAutoFit/>
           </a:bodyPr>
           <a:lstStyle/>
           <a:p>
             <a:pPr>
-              <a:defRPr sz="2200"/>
-            </a:pPr>
-            <a:r>
-              <a:t>Confidentiality means only authorized users can read the data.</a:t>
-            </a:r>
-          </a:p>
-          <a:p>
-            <a:pPr>
-              <a:defRPr sz="2200"/>
-            </a:pPr>
-            <a:r>
-              <a:t>Plaintext = readable data.</a:t>
-            </a:r>
-          </a:p>
-          <a:p>
-            <a:pPr>
-              <a:defRPr sz="2200"/>
-            </a:pPr>
-            <a:r>
-              <a:t>Ciphertext = encrypted, unreadable data.</a:t>
-            </a:r>
-          </a:p>
-          <a:p>
-            <a:pPr>
-              <a:defRPr sz="2200"/>
-            </a:pPr>
-            <a:r>
-              <a:t>Encryption converts plaintext into ciphertext.</a:t>
+              <a:defRPr b="1" sz="2500">
+                <a:solidFill>
+                  <a:srgbClr val="E8F8FF"/>
+                </a:solidFill>
+              </a:defRPr>
+            </a:pPr>
+            <a:r>
+              <a:t>What is Netcat?</a:t>
+            </a:r>
+          </a:p>
+        </p:txBody>
+      </p:sp>
+      <p:sp>
+        <p:nvSpPr>
+          <p:cNvPr id="4" name="TextBox 3"/>
+          <p:cNvSpPr txBox="1"/>
+          <p:nvPr/>
+        </p:nvSpPr>
+        <p:spPr>
+          <a:xfrm>
+            <a:off x="685800" y="1234440"/>
+            <a:ext cx="10835640" cy="5074920"/>
+          </a:xfrm>
+          <a:prstGeom prst="rect">
+            <a:avLst/>
+          </a:prstGeom>
+          <a:solidFill>
+            <a:srgbClr val="051222"/>
+          </a:solidFill>
+          <a:ln>
+            <a:solidFill>
+              <a:srgbClr val="2282B4"/>
+            </a:solidFill>
+          </a:ln>
+        </p:spPr>
+        <p:txBody>
+          <a:bodyPr wrap="square" lIns="228600" rIns="201168" tIns="164592">
+            <a:spAutoFit/>
+          </a:bodyPr>
+          <a:lstStyle/>
+          <a:p>
+            <a:pPr>
+              <a:spcAft>
+                <a:spcPts val="600"/>
+              </a:spcAft>
+              <a:defRPr sz="2000">
+                <a:solidFill>
+                  <a:srgbClr val="ECFAFF"/>
+                </a:solidFill>
+              </a:defRPr>
+            </a:pPr>
+            <a:r>
+              <a:t>Netcat is a command-line networking utility.</a:t>
+            </a:r>
+          </a:p>
+          <a:p>
+            <a:pPr>
+              <a:spcAft>
+                <a:spcPts val="600"/>
+              </a:spcAft>
+              <a:defRPr sz="2000">
+                <a:solidFill>
+                  <a:srgbClr val="ECFAFF"/>
+                </a:solidFill>
+              </a:defRPr>
+            </a:pPr>
+            <a:r>
+              <a:t>It can create simple TCP/UDP sender-receiver connections.</a:t>
+            </a:r>
+          </a:p>
+          <a:p>
+            <a:pPr>
+              <a:spcAft>
+                <a:spcPts val="600"/>
+              </a:spcAft>
+              <a:defRPr sz="2000">
+                <a:solidFill>
+                  <a:srgbClr val="ECFAFF"/>
+                </a:solidFill>
+              </a:defRPr>
+            </a:pPr>
+            <a:r>
+              <a:t>It is used for testing ports, sending messages, and transferring files.</a:t>
+            </a:r>
+          </a:p>
+          <a:p>
+            <a:pPr>
+              <a:spcAft>
+                <a:spcPts val="600"/>
+              </a:spcAft>
+              <a:defRPr sz="2000">
+                <a:solidFill>
+                  <a:srgbClr val="ECFAFF"/>
+                </a:solidFill>
+              </a:defRPr>
+            </a:pPr>
+            <a:r>
+              <a:t>Normal Netcat sends data as plaintext.</a:t>
+            </a:r>
+          </a:p>
+          <a:p>
+            <a:pPr>
+              <a:spcAft>
+                <a:spcPts val="600"/>
+              </a:spcAft>
+              <a:defRPr sz="2000">
+                <a:solidFill>
+                  <a:srgbClr val="ECFAFF"/>
+                </a:solidFill>
+              </a:defRPr>
+            </a:pPr>
+            <a:r>
+              <a:t>Because it is simple, it is perfect for learning network security basics.</a:t>
             </a:r>
           </a:p>
         </p:txBody>
@@ -6035,85 +9133,173 @@
         <p:nvPr/>
       </p:nvGrpSpPr>
       <p:grpSpPr/>
-      <p:sp>
-        <p:nvSpPr>
-          <p:cNvPr id="2" name="Title 1"/>
-          <p:cNvSpPr>
-            <a:spLocks noGrp="1"/>
-          </p:cNvSpPr>
-          <p:nvPr>
-            <p:ph type="title"/>
-          </p:nvPr>
-        </p:nvSpPr>
-        <p:spPr/>
-        <p:txBody>
-          <a:bodyPr/>
-          <a:lstStyle/>
-          <a:p>
-            <a:pPr>
-              <a:defRPr b="1" sz="3000">
-                <a:solidFill>
-                  <a:srgbClr val="1F4E79"/>
-                </a:solidFill>
-              </a:defRPr>
-            </a:pPr>
-            <a:r>
-              <a:t>Tools Used</a:t>
-            </a:r>
-          </a:p>
-        </p:txBody>
-      </p:sp>
-      <p:sp>
-        <p:nvSpPr>
-          <p:cNvPr id="3" name="TextBox 2"/>
-          <p:cNvSpPr txBox="1"/>
+      <p:pic>
+        <p:nvPicPr>
+          <p:cNvPr id="2" name="Picture 1" descr="network_security_background.png"/>
+          <p:cNvPicPr>
+            <a:picLocks noChangeAspect="1"/>
+          </p:cNvPicPr>
           <p:nvPr/>
-        </p:nvSpPr>
+        </p:nvPicPr>
+        <p:blipFill>
+          <a:blip r:embed="rId2"/>
+          <a:stretch>
+            <a:fillRect/>
+          </a:stretch>
+        </p:blipFill>
         <p:spPr>
           <a:xfrm>
-            <a:off x="731520" y="1417320"/>
-            <a:ext cx="7955279" cy="4389120"/>
+            <a:off x="0" y="0"/>
+            <a:ext cx="12191695" cy="6858000"/>
           </a:xfrm>
           <a:prstGeom prst="rect">
             <a:avLst/>
           </a:prstGeom>
-          <a:noFill/>
         </p:spPr>
-        <p:txBody>
-          <a:bodyPr wrap="square">
+      </p:pic>
+      <p:sp>
+        <p:nvSpPr>
+          <p:cNvPr id="3" name="TextBox 2"/>
+          <p:cNvSpPr txBox="1"/>
+          <p:nvPr/>
+        </p:nvSpPr>
+        <p:spPr>
+          <a:xfrm>
+            <a:off x="502920" y="301752"/>
+            <a:ext cx="11155680" cy="658368"/>
+          </a:xfrm>
+          <a:prstGeom prst="rect">
+            <a:avLst/>
+          </a:prstGeom>
+          <a:solidFill>
+            <a:srgbClr val="040F1E"/>
+          </a:solidFill>
+          <a:ln>
+            <a:solidFill>
+              <a:srgbClr val="4BCDFF"/>
+            </a:solidFill>
+          </a:ln>
+        </p:spPr>
+        <p:txBody>
+          <a:bodyPr wrap="none">
             <a:spAutoFit/>
           </a:bodyPr>
           <a:lstStyle/>
           <a:p>
             <a:pPr>
-              <a:defRPr sz="2200"/>
-            </a:pPr>
-            <a:r>
-              <a:t>Netcat (nc): plaintext sender/receiver channel</a:t>
-            </a:r>
-          </a:p>
-          <a:p>
-            <a:pPr>
-              <a:defRPr sz="2200"/>
-            </a:pPr>
-            <a:r>
-              <a:t>Ncat SSL: encrypted Netcat-compatible channel</a:t>
-            </a:r>
-          </a:p>
-          <a:p>
-            <a:pPr>
-              <a:defRPr sz="2200"/>
-            </a:pPr>
-            <a:r>
-              <a:t>Wireshark: packet capture and traffic inspection</a:t>
-            </a:r>
-          </a:p>
-          <a:p>
-            <a:pPr>
-              <a:defRPr sz="2200"/>
-            </a:pPr>
-            <a:r>
-              <a:t>OpenSSL: creates a temporary certificate</a:t>
+              <a:defRPr b="1" sz="2500">
+                <a:solidFill>
+                  <a:srgbClr val="E8F8FF"/>
+                </a:solidFill>
+              </a:defRPr>
+            </a:pPr>
+            <a:r>
+              <a:t>Why Use Ncat SSL?</a:t>
+            </a:r>
+          </a:p>
+        </p:txBody>
+      </p:sp>
+      <p:sp>
+        <p:nvSpPr>
+          <p:cNvPr id="4" name="TextBox 3"/>
+          <p:cNvSpPr txBox="1"/>
+          <p:nvPr/>
+        </p:nvSpPr>
+        <p:spPr>
+          <a:xfrm>
+            <a:off x="685800" y="1234440"/>
+            <a:ext cx="10835640" cy="5074920"/>
+          </a:xfrm>
+          <a:prstGeom prst="rect">
+            <a:avLst/>
+          </a:prstGeom>
+          <a:solidFill>
+            <a:srgbClr val="051222"/>
+          </a:solidFill>
+          <a:ln>
+            <a:solidFill>
+              <a:srgbClr val="2282B4"/>
+            </a:solidFill>
+          </a:ln>
+        </p:spPr>
+        <p:txBody>
+          <a:bodyPr wrap="square" lIns="228600" rIns="201168" tIns="164592">
+            <a:spAutoFit/>
+          </a:bodyPr>
+          <a:lstStyle/>
+          <a:p>
+            <a:pPr>
+              <a:spcAft>
+                <a:spcPts val="600"/>
+              </a:spcAft>
+              <a:defRPr sz="2000">
+                <a:solidFill>
+                  <a:srgbClr val="ECFAFF"/>
+                </a:solidFill>
+              </a:defRPr>
+            </a:pPr>
+            <a:r>
+              <a:t>Traditional Netcat does not encrypt data.</a:t>
+            </a:r>
+          </a:p>
+          <a:p>
+            <a:pPr>
+              <a:spcAft>
+                <a:spcPts val="600"/>
+              </a:spcAft>
+              <a:defRPr sz="2000">
+                <a:solidFill>
+                  <a:srgbClr val="ECFAFF"/>
+                </a:solidFill>
+              </a:defRPr>
+            </a:pPr>
+            <a:r>
+              <a:t>Ncat is a Netcat-compatible tool from the Nmap project.</a:t>
+            </a:r>
+          </a:p>
+          <a:p>
+            <a:pPr>
+              <a:spcAft>
+                <a:spcPts val="600"/>
+              </a:spcAft>
+              <a:defRPr sz="2000">
+                <a:solidFill>
+                  <a:srgbClr val="ECFAFF"/>
+                </a:solidFill>
+              </a:defRPr>
+            </a:pPr>
+            <a:r>
+              <a:t>Ncat supports SSL/TLS using the --ssl option.</a:t>
+            </a:r>
+          </a:p>
+          <a:p>
+            <a:pPr>
+              <a:spcAft>
+                <a:spcPts val="600"/>
+              </a:spcAft>
+              <a:defRPr sz="2000">
+                <a:solidFill>
+                  <a:srgbClr val="ECFAFF"/>
+                </a:solidFill>
+              </a:defRPr>
+            </a:pPr>
+            <a:r>
+              <a:t>This lets us compare an unsafe channel and an encrypted channel clearly.</a:t>
+            </a:r>
+          </a:p>
+          <a:p>
+            <a:pPr>
+              <a:spcAft>
+                <a:spcPts val="600"/>
+              </a:spcAft>
+              <a:defRPr sz="2000">
+                <a:solidFill>
+                  <a:srgbClr val="ECFAFF"/>
+                </a:solidFill>
+              </a:defRPr>
+            </a:pPr>
+            <a:r>
+              <a:t>The project still stays within the Netcat-family tool idea.</a:t>
             </a:r>
           </a:p>
         </p:txBody>
@@ -6136,93 +9322,173 @@
         <p:nvPr/>
       </p:nvGrpSpPr>
       <p:grpSpPr/>
-      <p:sp>
-        <p:nvSpPr>
-          <p:cNvPr id="2" name="Title 1"/>
-          <p:cNvSpPr>
-            <a:spLocks noGrp="1"/>
-          </p:cNvSpPr>
-          <p:nvPr>
-            <p:ph type="title"/>
-          </p:nvPr>
-        </p:nvSpPr>
-        <p:spPr/>
-        <p:txBody>
-          <a:bodyPr/>
-          <a:lstStyle/>
-          <a:p>
-            <a:pPr>
-              <a:defRPr b="1" sz="3000">
-                <a:solidFill>
-                  <a:srgbClr val="1F4E79"/>
-                </a:solidFill>
-              </a:defRPr>
-            </a:pPr>
-            <a:r>
-              <a:t>Mini Project Workflow</a:t>
-            </a:r>
-          </a:p>
-        </p:txBody>
-      </p:sp>
-      <p:sp>
-        <p:nvSpPr>
-          <p:cNvPr id="3" name="TextBox 2"/>
-          <p:cNvSpPr txBox="1"/>
+      <p:pic>
+        <p:nvPicPr>
+          <p:cNvPr id="2" name="Picture 1" descr="network_security_background.png"/>
+          <p:cNvPicPr>
+            <a:picLocks noChangeAspect="1"/>
+          </p:cNvPicPr>
           <p:nvPr/>
-        </p:nvSpPr>
+        </p:nvPicPr>
+        <p:blipFill>
+          <a:blip r:embed="rId2"/>
+          <a:stretch>
+            <a:fillRect/>
+          </a:stretch>
+        </p:blipFill>
         <p:spPr>
           <a:xfrm>
-            <a:off x="731520" y="1417320"/>
-            <a:ext cx="7955279" cy="4389120"/>
+            <a:off x="0" y="0"/>
+            <a:ext cx="12191695" cy="6858000"/>
           </a:xfrm>
           <a:prstGeom prst="rect">
             <a:avLst/>
           </a:prstGeom>
-          <a:noFill/>
         </p:spPr>
-        <p:txBody>
-          <a:bodyPr wrap="square">
+      </p:pic>
+      <p:sp>
+        <p:nvSpPr>
+          <p:cNvPr id="3" name="TextBox 2"/>
+          <p:cNvSpPr txBox="1"/>
+          <p:nvPr/>
+        </p:nvSpPr>
+        <p:spPr>
+          <a:xfrm>
+            <a:off x="502920" y="301752"/>
+            <a:ext cx="11155680" cy="658368"/>
+          </a:xfrm>
+          <a:prstGeom prst="rect">
+            <a:avLst/>
+          </a:prstGeom>
+          <a:solidFill>
+            <a:srgbClr val="040F1E"/>
+          </a:solidFill>
+          <a:ln>
+            <a:solidFill>
+              <a:srgbClr val="4BCDFF"/>
+            </a:solidFill>
+          </a:ln>
+        </p:spPr>
+        <p:txBody>
+          <a:bodyPr wrap="none">
             <a:spAutoFit/>
           </a:bodyPr>
           <a:lstStyle/>
           <a:p>
             <a:pPr>
-              <a:defRPr sz="2200"/>
-            </a:pPr>
-            <a:r>
-              <a:t>Step 1: Create a secret message file.</a:t>
-            </a:r>
-          </a:p>
-          <a:p>
-            <a:pPr>
-              <a:defRPr sz="2200"/>
-            </a:pPr>
-            <a:r>
-              <a:t>Step 2: Send it using normal Netcat on port 4444.</a:t>
-            </a:r>
-          </a:p>
-          <a:p>
-            <a:pPr>
-              <a:defRPr sz="2200"/>
-            </a:pPr>
-            <a:r>
-              <a:t>Step 3: Capture and read the message in Wireshark.</a:t>
-            </a:r>
-          </a:p>
-          <a:p>
-            <a:pPr>
-              <a:defRPr sz="2200"/>
-            </a:pPr>
-            <a:r>
-              <a:t>Step 4: Send same file using Ncat SSL on port 4445.</a:t>
-            </a:r>
-          </a:p>
-          <a:p>
-            <a:pPr>
-              <a:defRPr sz="2200"/>
-            </a:pPr>
-            <a:r>
-              <a:t>Step 5: Capture again and compare readability.</a:t>
+              <a:defRPr b="1" sz="2500">
+                <a:solidFill>
+                  <a:srgbClr val="E8F8FF"/>
+                </a:solidFill>
+              </a:defRPr>
+            </a:pPr>
+            <a:r>
+              <a:t>Security Concept: Confidentiality</a:t>
+            </a:r>
+          </a:p>
+        </p:txBody>
+      </p:sp>
+      <p:sp>
+        <p:nvSpPr>
+          <p:cNvPr id="4" name="TextBox 3"/>
+          <p:cNvSpPr txBox="1"/>
+          <p:nvPr/>
+        </p:nvSpPr>
+        <p:spPr>
+          <a:xfrm>
+            <a:off x="685800" y="1234440"/>
+            <a:ext cx="10835640" cy="5074920"/>
+          </a:xfrm>
+          <a:prstGeom prst="rect">
+            <a:avLst/>
+          </a:prstGeom>
+          <a:solidFill>
+            <a:srgbClr val="051222"/>
+          </a:solidFill>
+          <a:ln>
+            <a:solidFill>
+              <a:srgbClr val="2282B4"/>
+            </a:solidFill>
+          </a:ln>
+        </p:spPr>
+        <p:txBody>
+          <a:bodyPr wrap="square" lIns="228600" rIns="201168" tIns="164592">
+            <a:spAutoFit/>
+          </a:bodyPr>
+          <a:lstStyle/>
+          <a:p>
+            <a:pPr>
+              <a:spcAft>
+                <a:spcPts val="600"/>
+              </a:spcAft>
+              <a:defRPr sz="2000">
+                <a:solidFill>
+                  <a:srgbClr val="ECFAFF"/>
+                </a:solidFill>
+              </a:defRPr>
+            </a:pPr>
+            <a:r>
+              <a:t>Confidentiality means only authorized users can read the data.</a:t>
+            </a:r>
+          </a:p>
+          <a:p>
+            <a:pPr>
+              <a:spcAft>
+                <a:spcPts val="600"/>
+              </a:spcAft>
+              <a:defRPr sz="2000">
+                <a:solidFill>
+                  <a:srgbClr val="ECFAFF"/>
+                </a:solidFill>
+              </a:defRPr>
+            </a:pPr>
+            <a:r>
+              <a:t>Plaintext is readable data before encryption.</a:t>
+            </a:r>
+          </a:p>
+          <a:p>
+            <a:pPr>
+              <a:spcAft>
+                <a:spcPts val="600"/>
+              </a:spcAft>
+              <a:defRPr sz="2000">
+                <a:solidFill>
+                  <a:srgbClr val="ECFAFF"/>
+                </a:solidFill>
+              </a:defRPr>
+            </a:pPr>
+            <a:r>
+              <a:t>Ciphertext is encrypted, unreadable data.</a:t>
+            </a:r>
+          </a:p>
+          <a:p>
+            <a:pPr>
+              <a:spcAft>
+                <a:spcPts val="600"/>
+              </a:spcAft>
+              <a:defRPr sz="2000">
+                <a:solidFill>
+                  <a:srgbClr val="ECFAFF"/>
+                </a:solidFill>
+              </a:defRPr>
+            </a:pPr>
+            <a:r>
+              <a:t>Encryption converts plaintext into ciphertext.</a:t>
+            </a:r>
+          </a:p>
+          <a:p>
+            <a:pPr>
+              <a:spcAft>
+                <a:spcPts val="600"/>
+              </a:spcAft>
+              <a:defRPr sz="2000">
+                <a:solidFill>
+                  <a:srgbClr val="ECFAFF"/>
+                </a:solidFill>
+              </a:defRPr>
+            </a:pPr>
+            <a:r>
+              <a:t>Our test: if Wireshark can read the secret message, confidentiality failed.</a:t>
             </a:r>
           </a:p>
         </p:txBody>
@@ -6245,85 +9511,173 @@
         <p:nvPr/>
       </p:nvGrpSpPr>
       <p:grpSpPr/>
-      <p:sp>
-        <p:nvSpPr>
-          <p:cNvPr id="2" name="Title 1"/>
-          <p:cNvSpPr>
-            <a:spLocks noGrp="1"/>
-          </p:cNvSpPr>
-          <p:nvPr>
-            <p:ph type="title"/>
-          </p:nvPr>
-        </p:nvSpPr>
-        <p:spPr/>
-        <p:txBody>
-          <a:bodyPr/>
-          <a:lstStyle/>
-          <a:p>
-            <a:pPr>
-              <a:defRPr b="1" sz="3000">
-                <a:solidFill>
-                  <a:srgbClr val="1F4E79"/>
-                </a:solidFill>
-              </a:defRPr>
-            </a:pPr>
-            <a:r>
-              <a:t>Experiment 1: Plaintext Netcat</a:t>
-            </a:r>
-          </a:p>
-        </p:txBody>
-      </p:sp>
-      <p:sp>
-        <p:nvSpPr>
-          <p:cNvPr id="3" name="TextBox 2"/>
-          <p:cNvSpPr txBox="1"/>
+      <p:pic>
+        <p:nvPicPr>
+          <p:cNvPr id="2" name="Picture 1" descr="network_security_background.png"/>
+          <p:cNvPicPr>
+            <a:picLocks noChangeAspect="1"/>
+          </p:cNvPicPr>
           <p:nvPr/>
-        </p:nvSpPr>
+        </p:nvPicPr>
+        <p:blipFill>
+          <a:blip r:embed="rId2"/>
+          <a:stretch>
+            <a:fillRect/>
+          </a:stretch>
+        </p:blipFill>
         <p:spPr>
           <a:xfrm>
-            <a:off x="731520" y="1417320"/>
-            <a:ext cx="7955279" cy="4389120"/>
+            <a:off x="0" y="0"/>
+            <a:ext cx="12191695" cy="6858000"/>
           </a:xfrm>
           <a:prstGeom prst="rect">
             <a:avLst/>
           </a:prstGeom>
-          <a:noFill/>
         </p:spPr>
-        <p:txBody>
-          <a:bodyPr wrap="square">
+      </p:pic>
+      <p:sp>
+        <p:nvSpPr>
+          <p:cNvPr id="3" name="TextBox 2"/>
+          <p:cNvSpPr txBox="1"/>
+          <p:nvPr/>
+        </p:nvSpPr>
+        <p:spPr>
+          <a:xfrm>
+            <a:off x="502920" y="301752"/>
+            <a:ext cx="11155680" cy="658368"/>
+          </a:xfrm>
+          <a:prstGeom prst="rect">
+            <a:avLst/>
+          </a:prstGeom>
+          <a:solidFill>
+            <a:srgbClr val="040F1E"/>
+          </a:solidFill>
+          <a:ln>
+            <a:solidFill>
+              <a:srgbClr val="4BCDFF"/>
+            </a:solidFill>
+          </a:ln>
+        </p:spPr>
+        <p:txBody>
+          <a:bodyPr wrap="none">
             <a:spAutoFit/>
           </a:bodyPr>
           <a:lstStyle/>
           <a:p>
             <a:pPr>
-              <a:defRPr sz="2200"/>
-            </a:pPr>
-            <a:r>
-              <a:t>Receiver: nc -lvnp 4444 &gt; received_plain.txt</a:t>
-            </a:r>
-          </a:p>
-          <a:p>
-            <a:pPr>
-              <a:defRPr sz="2200"/>
-            </a:pPr>
-            <a:r>
-              <a:t>Sender: nc 127.0.0.1 4444 &lt; secret_message.txt</a:t>
-            </a:r>
-          </a:p>
-          <a:p>
-            <a:pPr>
-              <a:defRPr sz="2200"/>
-            </a:pPr>
-            <a:r>
-              <a:t>Wireshark filter: tcp.port == 4444</a:t>
-            </a:r>
-          </a:p>
-          <a:p>
-            <a:pPr>
-              <a:defRPr sz="2200"/>
-            </a:pPr>
-            <a:r>
-              <a:t>Observation: message is visible in Follow TCP Stream.</a:t>
+              <a:defRPr b="1" sz="2500">
+                <a:solidFill>
+                  <a:srgbClr val="E8F8FF"/>
+                </a:solidFill>
+              </a:defRPr>
+            </a:pPr>
+            <a:r>
+              <a:t>Tools Used</a:t>
+            </a:r>
+          </a:p>
+        </p:txBody>
+      </p:sp>
+      <p:sp>
+        <p:nvSpPr>
+          <p:cNvPr id="4" name="TextBox 3"/>
+          <p:cNvSpPr txBox="1"/>
+          <p:nvPr/>
+        </p:nvSpPr>
+        <p:spPr>
+          <a:xfrm>
+            <a:off x="685800" y="1234440"/>
+            <a:ext cx="10835640" cy="5074920"/>
+          </a:xfrm>
+          <a:prstGeom prst="rect">
+            <a:avLst/>
+          </a:prstGeom>
+          <a:solidFill>
+            <a:srgbClr val="051222"/>
+          </a:solidFill>
+          <a:ln>
+            <a:solidFill>
+              <a:srgbClr val="2282B4"/>
+            </a:solidFill>
+          </a:ln>
+        </p:spPr>
+        <p:txBody>
+          <a:bodyPr wrap="square" lIns="228600" rIns="201168" tIns="164592">
+            <a:spAutoFit/>
+          </a:bodyPr>
+          <a:lstStyle/>
+          <a:p>
+            <a:pPr>
+              <a:spcAft>
+                <a:spcPts val="600"/>
+              </a:spcAft>
+              <a:defRPr sz="2000">
+                <a:solidFill>
+                  <a:srgbClr val="ECFAFF"/>
+                </a:solidFill>
+              </a:defRPr>
+            </a:pPr>
+            <a:r>
+              <a:t>Netcat (nc): plaintext transfer on port 4444.</a:t>
+            </a:r>
+          </a:p>
+          <a:p>
+            <a:pPr>
+              <a:spcAft>
+                <a:spcPts val="600"/>
+              </a:spcAft>
+              <a:defRPr sz="2000">
+                <a:solidFill>
+                  <a:srgbClr val="ECFAFF"/>
+                </a:solidFill>
+              </a:defRPr>
+            </a:pPr>
+            <a:r>
+              <a:t>Ncat SSL: encrypted transfer on port 4445.</a:t>
+            </a:r>
+          </a:p>
+          <a:p>
+            <a:pPr>
+              <a:spcAft>
+                <a:spcPts val="600"/>
+              </a:spcAft>
+              <a:defRPr sz="2000">
+                <a:solidFill>
+                  <a:srgbClr val="ECFAFF"/>
+                </a:solidFill>
+              </a:defRPr>
+            </a:pPr>
+            <a:r>
+              <a:t>Wireshark: captures and inspects packets.</a:t>
+            </a:r>
+          </a:p>
+          <a:p>
+            <a:pPr>
+              <a:spcAft>
+                <a:spcPts val="600"/>
+              </a:spcAft>
+              <a:defRPr sz="2000">
+                <a:solidFill>
+                  <a:srgbClr val="ECFAFF"/>
+                </a:solidFill>
+              </a:defRPr>
+            </a:pPr>
+            <a:r>
+              <a:t>OpenSSL: generates a temporary SSL certificate.</a:t>
+            </a:r>
+          </a:p>
+          <a:p>
+            <a:pPr>
+              <a:spcAft>
+                <a:spcPts val="600"/>
+              </a:spcAft>
+              <a:defRPr sz="2000">
+                <a:solidFill>
+                  <a:srgbClr val="ECFAFF"/>
+                </a:solidFill>
+              </a:defRPr>
+            </a:pPr>
+            <a:r>
+              <a:t>Two terminals: one receiver and one sender.</a:t>
             </a:r>
           </a:p>
         </p:txBody>
@@ -6346,85 +9700,173 @@
         <p:nvPr/>
       </p:nvGrpSpPr>
       <p:grpSpPr/>
-      <p:sp>
-        <p:nvSpPr>
-          <p:cNvPr id="2" name="Title 1"/>
-          <p:cNvSpPr>
-            <a:spLocks noGrp="1"/>
-          </p:cNvSpPr>
-          <p:nvPr>
-            <p:ph type="title"/>
-          </p:nvPr>
-        </p:nvSpPr>
-        <p:spPr/>
-        <p:txBody>
-          <a:bodyPr/>
-          <a:lstStyle/>
-          <a:p>
-            <a:pPr>
-              <a:defRPr b="1" sz="3000">
-                <a:solidFill>
-                  <a:srgbClr val="1F4E79"/>
-                </a:solidFill>
-              </a:defRPr>
-            </a:pPr>
-            <a:r>
-              <a:t>Cryptanalysis: Packet Sniffing</a:t>
-            </a:r>
-          </a:p>
-        </p:txBody>
-      </p:sp>
-      <p:sp>
-        <p:nvSpPr>
-          <p:cNvPr id="3" name="TextBox 2"/>
-          <p:cNvSpPr txBox="1"/>
+      <p:pic>
+        <p:nvPicPr>
+          <p:cNvPr id="2" name="Picture 1" descr="network_security_background.png"/>
+          <p:cNvPicPr>
+            <a:picLocks noChangeAspect="1"/>
+          </p:cNvPicPr>
           <p:nvPr/>
-        </p:nvSpPr>
+        </p:nvPicPr>
+        <p:blipFill>
+          <a:blip r:embed="rId2"/>
+          <a:stretch>
+            <a:fillRect/>
+          </a:stretch>
+        </p:blipFill>
         <p:spPr>
           <a:xfrm>
-            <a:off x="731520" y="1417320"/>
-            <a:ext cx="7955279" cy="4389120"/>
+            <a:off x="0" y="0"/>
+            <a:ext cx="12191695" cy="6858000"/>
           </a:xfrm>
           <a:prstGeom prst="rect">
             <a:avLst/>
           </a:prstGeom>
-          <a:noFill/>
         </p:spPr>
-        <p:txBody>
-          <a:bodyPr wrap="square">
+      </p:pic>
+      <p:sp>
+        <p:nvSpPr>
+          <p:cNvPr id="3" name="TextBox 2"/>
+          <p:cNvSpPr txBox="1"/>
+          <p:nvPr/>
+        </p:nvSpPr>
+        <p:spPr>
+          <a:xfrm>
+            <a:off x="502920" y="301752"/>
+            <a:ext cx="11155680" cy="658368"/>
+          </a:xfrm>
+          <a:prstGeom prst="rect">
+            <a:avLst/>
+          </a:prstGeom>
+          <a:solidFill>
+            <a:srgbClr val="040F1E"/>
+          </a:solidFill>
+          <a:ln>
+            <a:solidFill>
+              <a:srgbClr val="4BCDFF"/>
+            </a:solidFill>
+          </a:ln>
+        </p:spPr>
+        <p:txBody>
+          <a:bodyPr wrap="none">
             <a:spAutoFit/>
           </a:bodyPr>
           <a:lstStyle/>
           <a:p>
             <a:pPr>
-              <a:defRPr sz="2200"/>
-            </a:pPr>
-            <a:r>
-              <a:t>Attacker opens Wireshark and captures packets.</a:t>
-            </a:r>
-          </a:p>
-          <a:p>
-            <a:pPr>
-              <a:defRPr sz="2200"/>
-            </a:pPr>
-            <a:r>
-              <a:t>Attacker follows the TCP stream.</a:t>
-            </a:r>
-          </a:p>
-          <a:p>
-            <a:pPr>
-              <a:defRPr sz="2200"/>
-            </a:pPr>
-            <a:r>
-              <a:t>In plaintext mode, the secret message appears directly.</a:t>
-            </a:r>
-          </a:p>
-          <a:p>
-            <a:pPr>
-              <a:defRPr sz="2200"/>
-            </a:pPr>
-            <a:r>
-              <a:t>No decryption skill is needed because there is no encryption.</a:t>
+              <a:defRPr b="1" sz="2500">
+                <a:solidFill>
+                  <a:srgbClr val="E8F8FF"/>
+                </a:solidFill>
+              </a:defRPr>
+            </a:pPr>
+            <a:r>
+              <a:t>Mini Project Architecture</a:t>
+            </a:r>
+          </a:p>
+        </p:txBody>
+      </p:sp>
+      <p:sp>
+        <p:nvSpPr>
+          <p:cNvPr id="4" name="TextBox 3"/>
+          <p:cNvSpPr txBox="1"/>
+          <p:nvPr/>
+        </p:nvSpPr>
+        <p:spPr>
+          <a:xfrm>
+            <a:off x="685800" y="1234440"/>
+            <a:ext cx="10835640" cy="5074920"/>
+          </a:xfrm>
+          <a:prstGeom prst="rect">
+            <a:avLst/>
+          </a:prstGeom>
+          <a:solidFill>
+            <a:srgbClr val="051222"/>
+          </a:solidFill>
+          <a:ln>
+            <a:solidFill>
+              <a:srgbClr val="2282B4"/>
+            </a:solidFill>
+          </a:ln>
+        </p:spPr>
+        <p:txBody>
+          <a:bodyPr wrap="square" lIns="228600" rIns="201168" tIns="164592">
+            <a:spAutoFit/>
+          </a:bodyPr>
+          <a:lstStyle/>
+          <a:p>
+            <a:pPr>
+              <a:spcAft>
+                <a:spcPts val="600"/>
+              </a:spcAft>
+              <a:defRPr sz="2000">
+                <a:solidFill>
+                  <a:srgbClr val="ECFAFF"/>
+                </a:solidFill>
+              </a:defRPr>
+            </a:pPr>
+            <a:r>
+              <a:t>Sender: sends secret_message.txt.</a:t>
+            </a:r>
+          </a:p>
+          <a:p>
+            <a:pPr>
+              <a:spcAft>
+                <a:spcPts val="600"/>
+              </a:spcAft>
+              <a:defRPr sz="2000">
+                <a:solidFill>
+                  <a:srgbClr val="ECFAFF"/>
+                </a:solidFill>
+              </a:defRPr>
+            </a:pPr>
+            <a:r>
+              <a:t>Receiver: saves the received file.</a:t>
+            </a:r>
+          </a:p>
+          <a:p>
+            <a:pPr>
+              <a:spcAft>
+                <a:spcPts val="600"/>
+              </a:spcAft>
+              <a:defRPr sz="2000">
+                <a:solidFill>
+                  <a:srgbClr val="ECFAFF"/>
+                </a:solidFill>
+              </a:defRPr>
+            </a:pPr>
+            <a:r>
+              <a:t>Observer/attacker: captures packets in Wireshark.</a:t>
+            </a:r>
+          </a:p>
+          <a:p>
+            <a:pPr>
+              <a:spcAft>
+                <a:spcPts val="600"/>
+              </a:spcAft>
+              <a:defRPr sz="2000">
+                <a:solidFill>
+                  <a:srgbClr val="ECFAFF"/>
+                </a:solidFill>
+              </a:defRPr>
+            </a:pPr>
+            <a:r>
+              <a:t>Plaintext path: Sender -&gt; nc -&gt; Receiver; Wireshark reads message.</a:t>
+            </a:r>
+          </a:p>
+          <a:p>
+            <a:pPr>
+              <a:spcAft>
+                <a:spcPts val="600"/>
+              </a:spcAft>
+              <a:defRPr sz="2000">
+                <a:solidFill>
+                  <a:srgbClr val="ECFAFF"/>
+                </a:solidFill>
+              </a:defRPr>
+            </a:pPr>
+            <a:r>
+              <a:t>Encrypted path: Sender -&gt; ncat --ssl -&gt; Receiver; Wireshark cannot read message.</a:t>
             </a:r>
           </a:p>
         </p:txBody>
